--- a/Doc Slide/Pluo/Slide_Pluo.pptx
+++ b/Doc Slide/Pluo/Slide_Pluo.pptx
@@ -266,7 +266,7 @@
           <a:p>
             <a:fld id="{AFF98120-A03B-421F-8E42-0D275B84E880}" type="datetimeFigureOut">
               <a:rPr lang="es-AR" smtClean="0"/>
-              <a:t>9/12/2025</a:t>
+              <a:t>10/12/2025</a:t>
             </a:fld>
             <a:endParaRPr lang="es-AR"/>
           </a:p>
@@ -466,7 +466,7 @@
           <a:p>
             <a:fld id="{AFF98120-A03B-421F-8E42-0D275B84E880}" type="datetimeFigureOut">
               <a:rPr lang="es-AR" smtClean="0"/>
-              <a:t>9/12/2025</a:t>
+              <a:t>10/12/2025</a:t>
             </a:fld>
             <a:endParaRPr lang="es-AR"/>
           </a:p>
@@ -676,7 +676,7 @@
           <a:p>
             <a:fld id="{AFF98120-A03B-421F-8E42-0D275B84E880}" type="datetimeFigureOut">
               <a:rPr lang="es-AR" smtClean="0"/>
-              <a:t>9/12/2025</a:t>
+              <a:t>10/12/2025</a:t>
             </a:fld>
             <a:endParaRPr lang="es-AR"/>
           </a:p>
@@ -876,7 +876,7 @@
           <a:p>
             <a:fld id="{AFF98120-A03B-421F-8E42-0D275B84E880}" type="datetimeFigureOut">
               <a:rPr lang="es-AR" smtClean="0"/>
-              <a:t>9/12/2025</a:t>
+              <a:t>10/12/2025</a:t>
             </a:fld>
             <a:endParaRPr lang="es-AR"/>
           </a:p>
@@ -1152,7 +1152,7 @@
           <a:p>
             <a:fld id="{AFF98120-A03B-421F-8E42-0D275B84E880}" type="datetimeFigureOut">
               <a:rPr lang="es-AR" smtClean="0"/>
-              <a:t>9/12/2025</a:t>
+              <a:t>10/12/2025</a:t>
             </a:fld>
             <a:endParaRPr lang="es-AR"/>
           </a:p>
@@ -1420,7 +1420,7 @@
           <a:p>
             <a:fld id="{AFF98120-A03B-421F-8E42-0D275B84E880}" type="datetimeFigureOut">
               <a:rPr lang="es-AR" smtClean="0"/>
-              <a:t>9/12/2025</a:t>
+              <a:t>10/12/2025</a:t>
             </a:fld>
             <a:endParaRPr lang="es-AR"/>
           </a:p>
@@ -1835,7 +1835,7 @@
           <a:p>
             <a:fld id="{AFF98120-A03B-421F-8E42-0D275B84E880}" type="datetimeFigureOut">
               <a:rPr lang="es-AR" smtClean="0"/>
-              <a:t>9/12/2025</a:t>
+              <a:t>10/12/2025</a:t>
             </a:fld>
             <a:endParaRPr lang="es-AR"/>
           </a:p>
@@ -1977,7 +1977,7 @@
           <a:p>
             <a:fld id="{AFF98120-A03B-421F-8E42-0D275B84E880}" type="datetimeFigureOut">
               <a:rPr lang="es-AR" smtClean="0"/>
-              <a:t>9/12/2025</a:t>
+              <a:t>10/12/2025</a:t>
             </a:fld>
             <a:endParaRPr lang="es-AR"/>
           </a:p>
@@ -2090,7 +2090,7 @@
           <a:p>
             <a:fld id="{AFF98120-A03B-421F-8E42-0D275B84E880}" type="datetimeFigureOut">
               <a:rPr lang="es-AR" smtClean="0"/>
-              <a:t>9/12/2025</a:t>
+              <a:t>10/12/2025</a:t>
             </a:fld>
             <a:endParaRPr lang="es-AR"/>
           </a:p>
@@ -2403,7 +2403,7 @@
           <a:p>
             <a:fld id="{AFF98120-A03B-421F-8E42-0D275B84E880}" type="datetimeFigureOut">
               <a:rPr lang="es-AR" smtClean="0"/>
-              <a:t>9/12/2025</a:t>
+              <a:t>10/12/2025</a:t>
             </a:fld>
             <a:endParaRPr lang="es-AR"/>
           </a:p>
@@ -2692,7 +2692,7 @@
           <a:p>
             <a:fld id="{AFF98120-A03B-421F-8E42-0D275B84E880}" type="datetimeFigureOut">
               <a:rPr lang="es-AR" smtClean="0"/>
-              <a:t>9/12/2025</a:t>
+              <a:t>10/12/2025</a:t>
             </a:fld>
             <a:endParaRPr lang="es-AR"/>
           </a:p>
@@ -2935,7 +2935,7 @@
           <a:p>
             <a:fld id="{AFF98120-A03B-421F-8E42-0D275B84E880}" type="datetimeFigureOut">
               <a:rPr lang="es-AR" smtClean="0"/>
-              <a:t>9/12/2025</a:t>
+              <a:t>10/12/2025</a:t>
             </a:fld>
             <a:endParaRPr lang="es-AR"/>
           </a:p>
@@ -3456,14 +3456,22 @@
           <a:p>
             <a:pPr algn="l"/>
             <a:r>
-              <a:rPr lang="fr-FR" sz="4300">
+              <a:rPr lang="fr-FR" sz="4300" dirty="0">
                 <a:solidFill>
                   <a:schemeClr val="bg1"/>
                 </a:solidFill>
               </a:rPr>
-              <a:t>Solution d’estimation de prix avec IA pour Pluo</a:t>
-            </a:r>
-            <a:endParaRPr lang="es-AR" sz="4300">
+              <a:t>Solution d’estimation de prix avec IA pour </a:t>
+            </a:r>
+            <a:r>
+              <a:rPr lang="fr-FR" sz="4300" dirty="0" err="1">
+                <a:solidFill>
+                  <a:schemeClr val="bg1"/>
+                </a:solidFill>
+              </a:rPr>
+              <a:t>Pluo</a:t>
+            </a:r>
+            <a:endParaRPr lang="es-AR" sz="4300" dirty="0">
               <a:solidFill>
                 <a:schemeClr val="bg1"/>
               </a:solidFill>
@@ -3728,10 +3736,10 @@
       </p:grpSpPr>
       <p:sp useBgFill="1">
         <p:nvSpPr>
-          <p:cNvPr id="14" name="Rectangle 13">
-            <a:extLst>
-              <a:ext uri="{FF2B5EF4-FFF2-40B4-BE49-F238E27FC236}">
-                <a16:creationId xmlns:a16="http://schemas.microsoft.com/office/drawing/2014/main" id="{0E3596DD-156A-473E-9BB3-C6A29F7574E9}"/>
+          <p:cNvPr id="27" name="Rectangle 26">
+            <a:extLst>
+              <a:ext uri="{FF2B5EF4-FFF2-40B4-BE49-F238E27FC236}">
+                <a16:creationId xmlns:a16="http://schemas.microsoft.com/office/drawing/2014/main" id="{058A14AF-9FB5-4CC7-BA35-E8E85D3EDF0E}"/>
               </a:ext>
               <a:ext uri="{C183D7F6-B498-43B3-948B-1728B52AA6E4}">
                 <adec:decorative xmlns:adec="http://schemas.microsoft.com/office/drawing/2017/decorative" val="1"/>
@@ -3752,7 +3760,7 @@
         <p:spPr>
           <a:xfrm>
             <a:off x="0" y="0"/>
-            <a:ext cx="12188952" cy="6858000"/>
+            <a:ext cx="12191999" cy="6857365"/>
           </a:xfrm>
           <a:prstGeom prst="rect">
             <a:avLst/>
@@ -3788,10 +3796,53 @@
       </p:sp>
       <p:sp>
         <p:nvSpPr>
-          <p:cNvPr id="15" name="Freeform: Shape 11">
-            <a:extLst>
-              <a:ext uri="{FF2B5EF4-FFF2-40B4-BE49-F238E27FC236}">
-                <a16:creationId xmlns:a16="http://schemas.microsoft.com/office/drawing/2014/main" id="{2C46C4D6-C474-4E92-B52E-944C1118F7B6}"/>
+          <p:cNvPr id="2" name="Titre 1">
+            <a:extLst>
+              <a:ext uri="{FF2B5EF4-FFF2-40B4-BE49-F238E27FC236}">
+                <a16:creationId xmlns:a16="http://schemas.microsoft.com/office/drawing/2014/main" id="{4018F347-98F0-2EA3-EB71-33E05013476B}"/>
+              </a:ext>
+            </a:extLst>
+          </p:cNvPr>
+          <p:cNvSpPr>
+            <a:spLocks noGrp="1"/>
+          </p:cNvSpPr>
+          <p:nvPr>
+            <p:ph type="title"/>
+          </p:nvPr>
+        </p:nvSpPr>
+        <p:spPr>
+          <a:xfrm>
+            <a:off x="793662" y="386930"/>
+            <a:ext cx="10066122" cy="1298448"/>
+          </a:xfrm>
+        </p:spPr>
+        <p:txBody>
+          <a:bodyPr anchor="b">
+            <a:normAutofit/>
+          </a:bodyPr>
+          <a:lstStyle/>
+          <a:p>
+            <a:r>
+              <a:rPr lang="fr-FR" sz="3400" b="1"/>
+              <a:t>Objectif: </a:t>
+            </a:r>
+            <a:br>
+              <a:rPr lang="fr-FR" sz="3400" b="1"/>
+            </a:br>
+            <a:r>
+              <a:rPr lang="fr-FR" sz="3400"/>
+              <a:t>Automatiser une première estimation de prix à partir :</a:t>
+            </a:r>
+            <a:endParaRPr lang="es-AR" sz="3400"/>
+          </a:p>
+        </p:txBody>
+      </p:sp>
+      <p:sp>
+        <p:nvSpPr>
+          <p:cNvPr id="29" name="Rectangle 28">
+            <a:extLst>
+              <a:ext uri="{FF2B5EF4-FFF2-40B4-BE49-F238E27FC236}">
+                <a16:creationId xmlns:a16="http://schemas.microsoft.com/office/drawing/2014/main" id="{3A9A4357-BD1D-4622-A4FE-766E6AB8DE84}"/>
               </a:ext>
               <a:ext uri="{C183D7F6-B498-43B3-948B-1728B52AA6E4}">
                 <adec:decorative xmlns:adec="http://schemas.microsoft.com/office/drawing/2017/decorative" val="1"/>
@@ -3810,959 +3861,38 @@
           </p:nvPr>
         </p:nvSpPr>
         <p:spPr>
-          <a:xfrm flipH="1">
-            <a:off x="0" y="0"/>
-            <a:ext cx="5962785" cy="6858000"/>
+          <a:xfrm flipH="1" flipV="1">
+            <a:off x="-2" y="1998845"/>
+            <a:ext cx="11454595" cy="781699"/>
           </a:xfrm>
-          <a:custGeom>
+          <a:prstGeom prst="rect">
             <a:avLst/>
-            <a:gdLst>
-              <a:gd name="connsiteX0" fmla="*/ 1044839 w 5962785"/>
-              <a:gd name="connsiteY0" fmla="*/ 0 h 6858000"/>
-              <a:gd name="connsiteX1" fmla="*/ 5962785 w 5962785"/>
-              <a:gd name="connsiteY1" fmla="*/ 0 h 6858000"/>
-              <a:gd name="connsiteX2" fmla="*/ 5962785 w 5962785"/>
-              <a:gd name="connsiteY2" fmla="*/ 6858000 h 6858000"/>
-              <a:gd name="connsiteX3" fmla="*/ 1469886 w 5962785"/>
-              <a:gd name="connsiteY3" fmla="*/ 6858000 h 6858000"/>
-              <a:gd name="connsiteX4" fmla="*/ 1416006 w 5962785"/>
-              <a:gd name="connsiteY4" fmla="*/ 6823984 h 6858000"/>
-              <a:gd name="connsiteX5" fmla="*/ 1232473 w 5962785"/>
-              <a:gd name="connsiteY5" fmla="*/ 6733873 h 6858000"/>
-              <a:gd name="connsiteX6" fmla="*/ 1075471 w 5962785"/>
-              <a:gd name="connsiteY6" fmla="*/ 6503186 h 6858000"/>
-              <a:gd name="connsiteX7" fmla="*/ 1020229 w 5962785"/>
-              <a:gd name="connsiteY7" fmla="*/ 6438306 h 6858000"/>
-              <a:gd name="connsiteX8" fmla="*/ 883579 w 5962785"/>
-              <a:gd name="connsiteY8" fmla="*/ 6351798 h 6858000"/>
-              <a:gd name="connsiteX9" fmla="*/ 645167 w 5962785"/>
-              <a:gd name="connsiteY9" fmla="*/ 6167969 h 6858000"/>
-              <a:gd name="connsiteX10" fmla="*/ 732391 w 5962785"/>
-              <a:gd name="connsiteY10" fmla="*/ 6124716 h 6858000"/>
-              <a:gd name="connsiteX11" fmla="*/ 985339 w 5962785"/>
-              <a:gd name="connsiteY11" fmla="*/ 6236455 h 6858000"/>
-              <a:gd name="connsiteX12" fmla="*/ 1168509 w 5962785"/>
-              <a:gd name="connsiteY12" fmla="*/ 6265291 h 6858000"/>
-              <a:gd name="connsiteX13" fmla="*/ 909746 w 5962785"/>
-              <a:gd name="connsiteY13" fmla="*/ 6070649 h 6858000"/>
-              <a:gd name="connsiteX14" fmla="*/ 659704 w 5962785"/>
-              <a:gd name="connsiteY14" fmla="*/ 5818335 h 6858000"/>
-              <a:gd name="connsiteX15" fmla="*/ 851597 w 5962785"/>
-              <a:gd name="connsiteY15" fmla="*/ 5865193 h 6858000"/>
-              <a:gd name="connsiteX16" fmla="*/ 860319 w 5962785"/>
-              <a:gd name="connsiteY16" fmla="*/ 5832753 h 6858000"/>
-              <a:gd name="connsiteX17" fmla="*/ 691686 w 5962785"/>
-              <a:gd name="connsiteY17" fmla="*/ 5533581 h 6858000"/>
-              <a:gd name="connsiteX18" fmla="*/ 610278 w 5962785"/>
-              <a:gd name="connsiteY18" fmla="*/ 5411029 h 6858000"/>
-              <a:gd name="connsiteX19" fmla="*/ 238123 w 5962785"/>
-              <a:gd name="connsiteY19" fmla="*/ 5046976 h 6858000"/>
-              <a:gd name="connsiteX20" fmla="*/ 592833 w 5962785"/>
-              <a:gd name="connsiteY20" fmla="*/ 5209177 h 6858000"/>
-              <a:gd name="connsiteX21" fmla="*/ 226494 w 5962785"/>
-              <a:gd name="connsiteY21" fmla="*/ 4855939 h 6858000"/>
-              <a:gd name="connsiteX22" fmla="*/ 49139 w 5962785"/>
-              <a:gd name="connsiteY22" fmla="*/ 4726177 h 6858000"/>
-              <a:gd name="connsiteX23" fmla="*/ 5527 w 5962785"/>
-              <a:gd name="connsiteY23" fmla="*/ 4650483 h 6858000"/>
-              <a:gd name="connsiteX24" fmla="*/ 84029 w 5962785"/>
-              <a:gd name="connsiteY24" fmla="*/ 4632460 h 6858000"/>
-              <a:gd name="connsiteX25" fmla="*/ 325347 w 5962785"/>
-              <a:gd name="connsiteY25" fmla="*/ 4661296 h 6858000"/>
-              <a:gd name="connsiteX26" fmla="*/ 25879 w 5962785"/>
-              <a:gd name="connsiteY26" fmla="*/ 4423401 h 6858000"/>
-              <a:gd name="connsiteX27" fmla="*/ 249753 w 5962785"/>
-              <a:gd name="connsiteY27" fmla="*/ 4459446 h 6858000"/>
-              <a:gd name="connsiteX28" fmla="*/ 313718 w 5962785"/>
-              <a:gd name="connsiteY28" fmla="*/ 4365729 h 6858000"/>
-              <a:gd name="connsiteX29" fmla="*/ 418386 w 5962785"/>
-              <a:gd name="connsiteY29" fmla="*/ 4214341 h 6858000"/>
-              <a:gd name="connsiteX30" fmla="*/ 491072 w 5962785"/>
-              <a:gd name="connsiteY30" fmla="*/ 4131438 h 6858000"/>
-              <a:gd name="connsiteX31" fmla="*/ 520147 w 5962785"/>
-              <a:gd name="connsiteY31" fmla="*/ 3864706 h 6858000"/>
-              <a:gd name="connsiteX32" fmla="*/ 459090 w 5962785"/>
-              <a:gd name="connsiteY32" fmla="*/ 3572743 h 6858000"/>
-              <a:gd name="connsiteX33" fmla="*/ 290458 w 5962785"/>
-              <a:gd name="connsiteY33" fmla="*/ 3424959 h 6858000"/>
-              <a:gd name="connsiteX34" fmla="*/ 339884 w 5962785"/>
-              <a:gd name="connsiteY34" fmla="*/ 3259153 h 6858000"/>
-              <a:gd name="connsiteX35" fmla="*/ 697501 w 5962785"/>
-              <a:gd name="connsiteY35" fmla="*/ 3360078 h 6858000"/>
-              <a:gd name="connsiteX36" fmla="*/ 165437 w 5962785"/>
-              <a:gd name="connsiteY36" fmla="*/ 2967190 h 6858000"/>
-              <a:gd name="connsiteX37" fmla="*/ 255568 w 5962785"/>
-              <a:gd name="connsiteY37" fmla="*/ 2949167 h 6858000"/>
-              <a:gd name="connsiteX38" fmla="*/ 578296 w 5962785"/>
-              <a:gd name="connsiteY38" fmla="*/ 2725691 h 6858000"/>
-              <a:gd name="connsiteX39" fmla="*/ 595740 w 5962785"/>
-              <a:gd name="connsiteY39" fmla="*/ 2714876 h 6858000"/>
-              <a:gd name="connsiteX40" fmla="*/ 650982 w 5962785"/>
-              <a:gd name="connsiteY40" fmla="*/ 2574301 h 6858000"/>
-              <a:gd name="connsiteX41" fmla="*/ 825429 w 5962785"/>
-              <a:gd name="connsiteY41" fmla="*/ 2552674 h 6858000"/>
-              <a:gd name="connsiteX42" fmla="*/ 970802 w 5962785"/>
-              <a:gd name="connsiteY42" fmla="*/ 2585115 h 6858000"/>
-              <a:gd name="connsiteX43" fmla="*/ 1127805 w 5962785"/>
-              <a:gd name="connsiteY43" fmla="*/ 2545465 h 6858000"/>
-              <a:gd name="connsiteX44" fmla="*/ 1267362 w 5962785"/>
-              <a:gd name="connsiteY44" fmla="*/ 2563488 h 6858000"/>
-              <a:gd name="connsiteX45" fmla="*/ 1386568 w 5962785"/>
-              <a:gd name="connsiteY45" fmla="*/ 2538257 h 6858000"/>
-              <a:gd name="connsiteX46" fmla="*/ 1270270 w 5962785"/>
-              <a:gd name="connsiteY46" fmla="*/ 2419309 h 6858000"/>
-              <a:gd name="connsiteX47" fmla="*/ 1107453 w 5962785"/>
-              <a:gd name="connsiteY47" fmla="*/ 2419309 h 6858000"/>
-              <a:gd name="connsiteX48" fmla="*/ 991154 w 5962785"/>
-              <a:gd name="connsiteY48" fmla="*/ 2343615 h 6858000"/>
-              <a:gd name="connsiteX49" fmla="*/ 880671 w 5962785"/>
-              <a:gd name="connsiteY49" fmla="*/ 2206645 h 6858000"/>
-              <a:gd name="connsiteX50" fmla="*/ 491072 w 5962785"/>
-              <a:gd name="connsiteY50" fmla="*/ 1986771 h 6858000"/>
-              <a:gd name="connsiteX51" fmla="*/ 421293 w 5962785"/>
-              <a:gd name="connsiteY51" fmla="*/ 1903868 h 6858000"/>
-              <a:gd name="connsiteX52" fmla="*/ 1531941 w 5962785"/>
-              <a:gd name="connsiteY52" fmla="*/ 2224667 h 6858000"/>
-              <a:gd name="connsiteX53" fmla="*/ 1188861 w 5962785"/>
-              <a:gd name="connsiteY53" fmla="*/ 2091301 h 6858000"/>
-              <a:gd name="connsiteX54" fmla="*/ 1421458 w 5962785"/>
-              <a:gd name="connsiteY54" fmla="*/ 2116532 h 6858000"/>
-              <a:gd name="connsiteX55" fmla="*/ 1549386 w 5962785"/>
-              <a:gd name="connsiteY55" fmla="*/ 2026420 h 6858000"/>
-              <a:gd name="connsiteX56" fmla="*/ 1549386 w 5962785"/>
-              <a:gd name="connsiteY56" fmla="*/ 1997584 h 6858000"/>
-              <a:gd name="connsiteX57" fmla="*/ 1453440 w 5962785"/>
-              <a:gd name="connsiteY57" fmla="*/ 1914682 h 6858000"/>
-              <a:gd name="connsiteX58" fmla="*/ 1398198 w 5962785"/>
-              <a:gd name="connsiteY58" fmla="*/ 1860614 h 6858000"/>
-              <a:gd name="connsiteX59" fmla="*/ 1247011 w 5962785"/>
-              <a:gd name="connsiteY59" fmla="*/ 1665972 h 6858000"/>
-              <a:gd name="connsiteX60" fmla="*/ 1354586 w 5962785"/>
-              <a:gd name="connsiteY60" fmla="*/ 1644345 h 6858000"/>
-              <a:gd name="connsiteX61" fmla="*/ 1395290 w 5962785"/>
-              <a:gd name="connsiteY61" fmla="*/ 1604696 h 6858000"/>
-              <a:gd name="connsiteX62" fmla="*/ 1366216 w 5962785"/>
-              <a:gd name="connsiteY62" fmla="*/ 1547025 h 6858000"/>
-              <a:gd name="connsiteX63" fmla="*/ 1031858 w 5962785"/>
-              <a:gd name="connsiteY63" fmla="*/ 1370405 h 6858000"/>
-              <a:gd name="connsiteX64" fmla="*/ 1005692 w 5962785"/>
-              <a:gd name="connsiteY64" fmla="*/ 1233435 h 6858000"/>
-              <a:gd name="connsiteX65" fmla="*/ 1069655 w 5962785"/>
-              <a:gd name="connsiteY65" fmla="*/ 1211808 h 6858000"/>
-              <a:gd name="connsiteX66" fmla="*/ 1142342 w 5962785"/>
-              <a:gd name="connsiteY66" fmla="*/ 1222621 h 6858000"/>
-              <a:gd name="connsiteX67" fmla="*/ 1084193 w 5962785"/>
-              <a:gd name="connsiteY67" fmla="*/ 1114487 h 6858000"/>
-              <a:gd name="connsiteX68" fmla="*/ 848689 w 5962785"/>
-              <a:gd name="connsiteY68" fmla="*/ 1006353 h 6858000"/>
-              <a:gd name="connsiteX69" fmla="*/ 805077 w 5962785"/>
-              <a:gd name="connsiteY69" fmla="*/ 948681 h 6858000"/>
-              <a:gd name="connsiteX70" fmla="*/ 863226 w 5962785"/>
-              <a:gd name="connsiteY70" fmla="*/ 919844 h 6858000"/>
-              <a:gd name="connsiteX71" fmla="*/ 906838 w 5962785"/>
-              <a:gd name="connsiteY71" fmla="*/ 909031 h 6858000"/>
-              <a:gd name="connsiteX72" fmla="*/ 5527 w 5962785"/>
-              <a:gd name="connsiteY72" fmla="*/ 458471 h 6858000"/>
-              <a:gd name="connsiteX73" fmla="*/ 209049 w 5962785"/>
-              <a:gd name="connsiteY73" fmla="*/ 454867 h 6858000"/>
-              <a:gd name="connsiteX74" fmla="*/ 409664 w 5962785"/>
-              <a:gd name="connsiteY74" fmla="*/ 526956 h 6858000"/>
-              <a:gd name="connsiteX75" fmla="*/ 621908 w 5962785"/>
-              <a:gd name="connsiteY75" fmla="*/ 516143 h 6858000"/>
-              <a:gd name="connsiteX76" fmla="*/ 822522 w 5962785"/>
-              <a:gd name="connsiteY76" fmla="*/ 552188 h 6858000"/>
-              <a:gd name="connsiteX77" fmla="*/ 996969 w 5962785"/>
-              <a:gd name="connsiteY77" fmla="*/ 552188 h 6858000"/>
-              <a:gd name="connsiteX78" fmla="*/ 834151 w 5962785"/>
-              <a:gd name="connsiteY78" fmla="*/ 498120 h 6858000"/>
-              <a:gd name="connsiteX79" fmla="*/ 773095 w 5962785"/>
-              <a:gd name="connsiteY79" fmla="*/ 408008 h 6858000"/>
-              <a:gd name="connsiteX80" fmla="*/ 793447 w 5962785"/>
-              <a:gd name="connsiteY80" fmla="*/ 325106 h 6858000"/>
-              <a:gd name="connsiteX81" fmla="*/ 860319 w 5962785"/>
-              <a:gd name="connsiteY81" fmla="*/ 350336 h 6858000"/>
-              <a:gd name="connsiteX82" fmla="*/ 938820 w 5962785"/>
-              <a:gd name="connsiteY82" fmla="*/ 444054 h 6858000"/>
-              <a:gd name="connsiteX83" fmla="*/ 956265 w 5962785"/>
-              <a:gd name="connsiteY83" fmla="*/ 386381 h 6858000"/>
-              <a:gd name="connsiteX84" fmla="*/ 1002784 w 5962785"/>
-              <a:gd name="connsiteY84" fmla="*/ 343127 h 6858000"/>
-              <a:gd name="connsiteX85" fmla="*/ 1270270 w 5962785"/>
-              <a:gd name="connsiteY85" fmla="*/ 364755 h 6858000"/>
-              <a:gd name="connsiteX86" fmla="*/ 1092915 w 5962785"/>
-              <a:gd name="connsiteY86" fmla="*/ 180926 h 6858000"/>
-              <a:gd name="connsiteX87" fmla="*/ 979525 w 5962785"/>
-              <a:gd name="connsiteY87" fmla="*/ 152090 h 6858000"/>
-              <a:gd name="connsiteX88" fmla="*/ 953358 w 5962785"/>
-              <a:gd name="connsiteY88" fmla="*/ 76396 h 6858000"/>
-              <a:gd name="connsiteX89" fmla="*/ 1005692 w 5962785"/>
-              <a:gd name="connsiteY89" fmla="*/ 58373 h 6858000"/>
-              <a:gd name="connsiteX90" fmla="*/ 1267362 w 5962785"/>
-              <a:gd name="connsiteY90" fmla="*/ 123254 h 6858000"/>
-              <a:gd name="connsiteX91" fmla="*/ 1310975 w 5962785"/>
-              <a:gd name="connsiteY91" fmla="*/ 98023 h 6858000"/>
-              <a:gd name="connsiteX92" fmla="*/ 1159787 w 5962785"/>
-              <a:gd name="connsiteY92" fmla="*/ 43505 h 6858000"/>
-            </a:gdLst>
-            <a:ahLst/>
-            <a:cxnLst>
-              <a:cxn ang="0">
-                <a:pos x="connsiteX0" y="connsiteY0"/>
-              </a:cxn>
-              <a:cxn ang="0">
-                <a:pos x="connsiteX1" y="connsiteY1"/>
-              </a:cxn>
-              <a:cxn ang="0">
-                <a:pos x="connsiteX2" y="connsiteY2"/>
-              </a:cxn>
-              <a:cxn ang="0">
-                <a:pos x="connsiteX3" y="connsiteY3"/>
-              </a:cxn>
-              <a:cxn ang="0">
-                <a:pos x="connsiteX4" y="connsiteY4"/>
-              </a:cxn>
-              <a:cxn ang="0">
-                <a:pos x="connsiteX5" y="connsiteY5"/>
-              </a:cxn>
-              <a:cxn ang="0">
-                <a:pos x="connsiteX6" y="connsiteY6"/>
-              </a:cxn>
-              <a:cxn ang="0">
-                <a:pos x="connsiteX7" y="connsiteY7"/>
-              </a:cxn>
-              <a:cxn ang="0">
-                <a:pos x="connsiteX8" y="connsiteY8"/>
-              </a:cxn>
-              <a:cxn ang="0">
-                <a:pos x="connsiteX9" y="connsiteY9"/>
-              </a:cxn>
-              <a:cxn ang="0">
-                <a:pos x="connsiteX10" y="connsiteY10"/>
-              </a:cxn>
-              <a:cxn ang="0">
-                <a:pos x="connsiteX11" y="connsiteY11"/>
-              </a:cxn>
-              <a:cxn ang="0">
-                <a:pos x="connsiteX12" y="connsiteY12"/>
-              </a:cxn>
-              <a:cxn ang="0">
-                <a:pos x="connsiteX13" y="connsiteY13"/>
-              </a:cxn>
-              <a:cxn ang="0">
-                <a:pos x="connsiteX14" y="connsiteY14"/>
-              </a:cxn>
-              <a:cxn ang="0">
-                <a:pos x="connsiteX15" y="connsiteY15"/>
-              </a:cxn>
-              <a:cxn ang="0">
-                <a:pos x="connsiteX16" y="connsiteY16"/>
-              </a:cxn>
-              <a:cxn ang="0">
-                <a:pos x="connsiteX17" y="connsiteY17"/>
-              </a:cxn>
-              <a:cxn ang="0">
-                <a:pos x="connsiteX18" y="connsiteY18"/>
-              </a:cxn>
-              <a:cxn ang="0">
-                <a:pos x="connsiteX19" y="connsiteY19"/>
-              </a:cxn>
-              <a:cxn ang="0">
-                <a:pos x="connsiteX20" y="connsiteY20"/>
-              </a:cxn>
-              <a:cxn ang="0">
-                <a:pos x="connsiteX21" y="connsiteY21"/>
-              </a:cxn>
-              <a:cxn ang="0">
-                <a:pos x="connsiteX22" y="connsiteY22"/>
-              </a:cxn>
-              <a:cxn ang="0">
-                <a:pos x="connsiteX23" y="connsiteY23"/>
-              </a:cxn>
-              <a:cxn ang="0">
-                <a:pos x="connsiteX24" y="connsiteY24"/>
-              </a:cxn>
-              <a:cxn ang="0">
-                <a:pos x="connsiteX25" y="connsiteY25"/>
-              </a:cxn>
-              <a:cxn ang="0">
-                <a:pos x="connsiteX26" y="connsiteY26"/>
-              </a:cxn>
-              <a:cxn ang="0">
-                <a:pos x="connsiteX27" y="connsiteY27"/>
-              </a:cxn>
-              <a:cxn ang="0">
-                <a:pos x="connsiteX28" y="connsiteY28"/>
-              </a:cxn>
-              <a:cxn ang="0">
-                <a:pos x="connsiteX29" y="connsiteY29"/>
-              </a:cxn>
-              <a:cxn ang="0">
-                <a:pos x="connsiteX30" y="connsiteY30"/>
-              </a:cxn>
-              <a:cxn ang="0">
-                <a:pos x="connsiteX31" y="connsiteY31"/>
-              </a:cxn>
-              <a:cxn ang="0">
-                <a:pos x="connsiteX32" y="connsiteY32"/>
-              </a:cxn>
-              <a:cxn ang="0">
-                <a:pos x="connsiteX33" y="connsiteY33"/>
-              </a:cxn>
-              <a:cxn ang="0">
-                <a:pos x="connsiteX34" y="connsiteY34"/>
-              </a:cxn>
-              <a:cxn ang="0">
-                <a:pos x="connsiteX35" y="connsiteY35"/>
-              </a:cxn>
-              <a:cxn ang="0">
-                <a:pos x="connsiteX36" y="connsiteY36"/>
-              </a:cxn>
-              <a:cxn ang="0">
-                <a:pos x="connsiteX37" y="connsiteY37"/>
-              </a:cxn>
-              <a:cxn ang="0">
-                <a:pos x="connsiteX38" y="connsiteY38"/>
-              </a:cxn>
-              <a:cxn ang="0">
-                <a:pos x="connsiteX39" y="connsiteY39"/>
-              </a:cxn>
-              <a:cxn ang="0">
-                <a:pos x="connsiteX40" y="connsiteY40"/>
-              </a:cxn>
-              <a:cxn ang="0">
-                <a:pos x="connsiteX41" y="connsiteY41"/>
-              </a:cxn>
-              <a:cxn ang="0">
-                <a:pos x="connsiteX42" y="connsiteY42"/>
-              </a:cxn>
-              <a:cxn ang="0">
-                <a:pos x="connsiteX43" y="connsiteY43"/>
-              </a:cxn>
-              <a:cxn ang="0">
-                <a:pos x="connsiteX44" y="connsiteY44"/>
-              </a:cxn>
-              <a:cxn ang="0">
-                <a:pos x="connsiteX45" y="connsiteY45"/>
-              </a:cxn>
-              <a:cxn ang="0">
-                <a:pos x="connsiteX46" y="connsiteY46"/>
-              </a:cxn>
-              <a:cxn ang="0">
-                <a:pos x="connsiteX47" y="connsiteY47"/>
-              </a:cxn>
-              <a:cxn ang="0">
-                <a:pos x="connsiteX48" y="connsiteY48"/>
-              </a:cxn>
-              <a:cxn ang="0">
-                <a:pos x="connsiteX49" y="connsiteY49"/>
-              </a:cxn>
-              <a:cxn ang="0">
-                <a:pos x="connsiteX50" y="connsiteY50"/>
-              </a:cxn>
-              <a:cxn ang="0">
-                <a:pos x="connsiteX51" y="connsiteY51"/>
-              </a:cxn>
-              <a:cxn ang="0">
-                <a:pos x="connsiteX52" y="connsiteY52"/>
-              </a:cxn>
-              <a:cxn ang="0">
-                <a:pos x="connsiteX53" y="connsiteY53"/>
-              </a:cxn>
-              <a:cxn ang="0">
-                <a:pos x="connsiteX54" y="connsiteY54"/>
-              </a:cxn>
-              <a:cxn ang="0">
-                <a:pos x="connsiteX55" y="connsiteY55"/>
-              </a:cxn>
-              <a:cxn ang="0">
-                <a:pos x="connsiteX56" y="connsiteY56"/>
-              </a:cxn>
-              <a:cxn ang="0">
-                <a:pos x="connsiteX57" y="connsiteY57"/>
-              </a:cxn>
-              <a:cxn ang="0">
-                <a:pos x="connsiteX58" y="connsiteY58"/>
-              </a:cxn>
-              <a:cxn ang="0">
-                <a:pos x="connsiteX59" y="connsiteY59"/>
-              </a:cxn>
-              <a:cxn ang="0">
-                <a:pos x="connsiteX60" y="connsiteY60"/>
-              </a:cxn>
-              <a:cxn ang="0">
-                <a:pos x="connsiteX61" y="connsiteY61"/>
-              </a:cxn>
-              <a:cxn ang="0">
-                <a:pos x="connsiteX62" y="connsiteY62"/>
-              </a:cxn>
-              <a:cxn ang="0">
-                <a:pos x="connsiteX63" y="connsiteY63"/>
-              </a:cxn>
-              <a:cxn ang="0">
-                <a:pos x="connsiteX64" y="connsiteY64"/>
-              </a:cxn>
-              <a:cxn ang="0">
-                <a:pos x="connsiteX65" y="connsiteY65"/>
-              </a:cxn>
-              <a:cxn ang="0">
-                <a:pos x="connsiteX66" y="connsiteY66"/>
-              </a:cxn>
-              <a:cxn ang="0">
-                <a:pos x="connsiteX67" y="connsiteY67"/>
-              </a:cxn>
-              <a:cxn ang="0">
-                <a:pos x="connsiteX68" y="connsiteY68"/>
-              </a:cxn>
-              <a:cxn ang="0">
-                <a:pos x="connsiteX69" y="connsiteY69"/>
-              </a:cxn>
-              <a:cxn ang="0">
-                <a:pos x="connsiteX70" y="connsiteY70"/>
-              </a:cxn>
-              <a:cxn ang="0">
-                <a:pos x="connsiteX71" y="connsiteY71"/>
-              </a:cxn>
-              <a:cxn ang="0">
-                <a:pos x="connsiteX72" y="connsiteY72"/>
-              </a:cxn>
-              <a:cxn ang="0">
-                <a:pos x="connsiteX73" y="connsiteY73"/>
-              </a:cxn>
-              <a:cxn ang="0">
-                <a:pos x="connsiteX74" y="connsiteY74"/>
-              </a:cxn>
-              <a:cxn ang="0">
-                <a:pos x="connsiteX75" y="connsiteY75"/>
-              </a:cxn>
-              <a:cxn ang="0">
-                <a:pos x="connsiteX76" y="connsiteY76"/>
-              </a:cxn>
-              <a:cxn ang="0">
-                <a:pos x="connsiteX77" y="connsiteY77"/>
-              </a:cxn>
-              <a:cxn ang="0">
-                <a:pos x="connsiteX78" y="connsiteY78"/>
-              </a:cxn>
-              <a:cxn ang="0">
-                <a:pos x="connsiteX79" y="connsiteY79"/>
-              </a:cxn>
-              <a:cxn ang="0">
-                <a:pos x="connsiteX80" y="connsiteY80"/>
-              </a:cxn>
-              <a:cxn ang="0">
-                <a:pos x="connsiteX81" y="connsiteY81"/>
-              </a:cxn>
-              <a:cxn ang="0">
-                <a:pos x="connsiteX82" y="connsiteY82"/>
-              </a:cxn>
-              <a:cxn ang="0">
-                <a:pos x="connsiteX83" y="connsiteY83"/>
-              </a:cxn>
-              <a:cxn ang="0">
-                <a:pos x="connsiteX84" y="connsiteY84"/>
-              </a:cxn>
-              <a:cxn ang="0">
-                <a:pos x="connsiteX85" y="connsiteY85"/>
-              </a:cxn>
-              <a:cxn ang="0">
-                <a:pos x="connsiteX86" y="connsiteY86"/>
-              </a:cxn>
-              <a:cxn ang="0">
-                <a:pos x="connsiteX87" y="connsiteY87"/>
-              </a:cxn>
-              <a:cxn ang="0">
-                <a:pos x="connsiteX88" y="connsiteY88"/>
-              </a:cxn>
-              <a:cxn ang="0">
-                <a:pos x="connsiteX89" y="connsiteY89"/>
-              </a:cxn>
-              <a:cxn ang="0">
-                <a:pos x="connsiteX90" y="connsiteY90"/>
-              </a:cxn>
-              <a:cxn ang="0">
-                <a:pos x="connsiteX91" y="connsiteY91"/>
-              </a:cxn>
-              <a:cxn ang="0">
-                <a:pos x="connsiteX92" y="connsiteY92"/>
-              </a:cxn>
-            </a:cxnLst>
-            <a:rect l="l" t="t" r="r" b="b"/>
-            <a:pathLst>
-              <a:path w="5962785" h="6858000">
-                <a:moveTo>
-                  <a:pt x="1044839" y="0"/>
-                </a:moveTo>
-                <a:lnTo>
-                  <a:pt x="5962785" y="0"/>
-                </a:lnTo>
-                <a:lnTo>
-                  <a:pt x="5962785" y="6858000"/>
-                </a:lnTo>
-                <a:lnTo>
-                  <a:pt x="1469886" y="6858000"/>
-                </a:lnTo>
-                <a:lnTo>
-                  <a:pt x="1416006" y="6823984"/>
-                </a:lnTo>
-                <a:cubicBezTo>
-                  <a:pt x="1356767" y="6787940"/>
-                  <a:pt x="1296437" y="6755500"/>
-                  <a:pt x="1232473" y="6733873"/>
-                </a:cubicBezTo>
-                <a:cubicBezTo>
-                  <a:pt x="1145250" y="6705037"/>
-                  <a:pt x="1060933" y="6654575"/>
-                  <a:pt x="1075471" y="6503186"/>
-                </a:cubicBezTo>
-                <a:cubicBezTo>
-                  <a:pt x="1078378" y="6459932"/>
-                  <a:pt x="1055118" y="6427493"/>
-                  <a:pt x="1020229" y="6438306"/>
-                </a:cubicBezTo>
-                <a:cubicBezTo>
-                  <a:pt x="953358" y="6459932"/>
-                  <a:pt x="921375" y="6398656"/>
-                  <a:pt x="883579" y="6351798"/>
-                </a:cubicBezTo>
-                <a:cubicBezTo>
-                  <a:pt x="816707" y="6268895"/>
-                  <a:pt x="752743" y="6182387"/>
-                  <a:pt x="645167" y="6167969"/>
-                </a:cubicBezTo>
-                <a:cubicBezTo>
-                  <a:pt x="665519" y="6103088"/>
-                  <a:pt x="700408" y="6110298"/>
-                  <a:pt x="732391" y="6124716"/>
-                </a:cubicBezTo>
-                <a:cubicBezTo>
-                  <a:pt x="816707" y="6160761"/>
-                  <a:pt x="901023" y="6200410"/>
-                  <a:pt x="985339" y="6236455"/>
-                </a:cubicBezTo>
-                <a:cubicBezTo>
-                  <a:pt x="1040581" y="6258081"/>
-                  <a:pt x="1095822" y="6290522"/>
-                  <a:pt x="1168509" y="6265291"/>
-                </a:cubicBezTo>
-                <a:cubicBezTo>
-                  <a:pt x="1104545" y="6135530"/>
-                  <a:pt x="996969" y="6110298"/>
-                  <a:pt x="909746" y="6070649"/>
-                </a:cubicBezTo>
-                <a:cubicBezTo>
-                  <a:pt x="802169" y="6020185"/>
-                  <a:pt x="738206" y="5926470"/>
-                  <a:pt x="659704" y="5818335"/>
-                </a:cubicBezTo>
-                <a:cubicBezTo>
-                  <a:pt x="738206" y="5789500"/>
-                  <a:pt x="787632" y="5868798"/>
-                  <a:pt x="851597" y="5865193"/>
-                </a:cubicBezTo>
-                <a:cubicBezTo>
-                  <a:pt x="854504" y="5854380"/>
-                  <a:pt x="860319" y="5832753"/>
-                  <a:pt x="860319" y="5832753"/>
-                </a:cubicBezTo>
-                <a:cubicBezTo>
-                  <a:pt x="755650" y="5775081"/>
-                  <a:pt x="709132" y="5666947"/>
-                  <a:pt x="691686" y="5533581"/>
-                </a:cubicBezTo>
-                <a:cubicBezTo>
-                  <a:pt x="685872" y="5465095"/>
-                  <a:pt x="648075" y="5443468"/>
-                  <a:pt x="610278" y="5411029"/>
-                </a:cubicBezTo>
-                <a:cubicBezTo>
-                  <a:pt x="482350" y="5299289"/>
-                  <a:pt x="345700" y="5198364"/>
-                  <a:pt x="238123" y="5046976"/>
-                </a:cubicBezTo>
-                <a:cubicBezTo>
-                  <a:pt x="363144" y="5064998"/>
-                  <a:pt x="461997" y="5165924"/>
-                  <a:pt x="592833" y="5209177"/>
-                </a:cubicBezTo>
-                <a:cubicBezTo>
-                  <a:pt x="488165" y="5043371"/>
-                  <a:pt x="351514" y="4956864"/>
-                  <a:pt x="226494" y="4855939"/>
-                </a:cubicBezTo>
-                <a:cubicBezTo>
-                  <a:pt x="168344" y="4809081"/>
-                  <a:pt x="116011" y="4751408"/>
-                  <a:pt x="49139" y="4726177"/>
-                </a:cubicBezTo>
-                <a:cubicBezTo>
-                  <a:pt x="25879" y="4718968"/>
-                  <a:pt x="-14825" y="4700947"/>
-                  <a:pt x="5527" y="4650483"/>
-                </a:cubicBezTo>
-                <a:cubicBezTo>
-                  <a:pt x="22972" y="4607230"/>
-                  <a:pt x="54954" y="4621648"/>
-                  <a:pt x="84029" y="4632460"/>
-                </a:cubicBezTo>
-                <a:cubicBezTo>
-                  <a:pt x="153807" y="4661296"/>
-                  <a:pt x="229401" y="4661296"/>
-                  <a:pt x="325347" y="4661296"/>
-                </a:cubicBezTo>
-                <a:cubicBezTo>
-                  <a:pt x="243939" y="4524326"/>
-                  <a:pt x="95658" y="4567580"/>
-                  <a:pt x="25879" y="4423401"/>
-                </a:cubicBezTo>
-                <a:cubicBezTo>
-                  <a:pt x="113103" y="4398170"/>
-                  <a:pt x="179975" y="4448632"/>
-                  <a:pt x="249753" y="4459446"/>
-                </a:cubicBezTo>
-                <a:cubicBezTo>
-                  <a:pt x="313718" y="4470259"/>
-                  <a:pt x="328254" y="4445028"/>
-                  <a:pt x="313718" y="4365729"/>
-                </a:cubicBezTo>
-                <a:cubicBezTo>
-                  <a:pt x="290458" y="4243177"/>
-                  <a:pt x="325347" y="4181900"/>
-                  <a:pt x="418386" y="4214341"/>
-                </a:cubicBezTo>
-                <a:cubicBezTo>
-                  <a:pt x="505609" y="4246781"/>
-                  <a:pt x="514332" y="4199922"/>
-                  <a:pt x="491072" y="4131438"/>
-                </a:cubicBezTo>
-                <a:cubicBezTo>
-                  <a:pt x="456183" y="4030512"/>
-                  <a:pt x="493979" y="3951214"/>
-                  <a:pt x="520147" y="3864706"/>
-                </a:cubicBezTo>
-                <a:cubicBezTo>
-                  <a:pt x="560851" y="3734945"/>
-                  <a:pt x="543407" y="3670064"/>
-                  <a:pt x="459090" y="3572743"/>
-                </a:cubicBezTo>
-                <a:cubicBezTo>
-                  <a:pt x="409664" y="3518676"/>
-                  <a:pt x="360236" y="3471818"/>
-                  <a:pt x="290458" y="3424959"/>
-                </a:cubicBezTo>
-                <a:cubicBezTo>
-                  <a:pt x="450368" y="3399728"/>
-                  <a:pt x="284643" y="3313221"/>
-                  <a:pt x="339884" y="3259153"/>
-                </a:cubicBezTo>
-                <a:cubicBezTo>
-                  <a:pt x="453275" y="3237527"/>
-                  <a:pt x="543407" y="3410542"/>
-                  <a:pt x="697501" y="3360078"/>
-                </a:cubicBezTo>
-                <a:cubicBezTo>
-                  <a:pt x="511425" y="3212294"/>
-                  <a:pt x="302087" y="3165436"/>
-                  <a:pt x="165437" y="2967190"/>
-                </a:cubicBezTo>
-                <a:cubicBezTo>
-                  <a:pt x="197419" y="2923937"/>
-                  <a:pt x="229401" y="2967190"/>
-                  <a:pt x="255568" y="2949167"/>
-                </a:cubicBezTo>
-                <a:cubicBezTo>
-                  <a:pt x="255568" y="2938354"/>
-                  <a:pt x="560851" y="3006840"/>
-                  <a:pt x="578296" y="2725691"/>
-                </a:cubicBezTo>
-                <a:cubicBezTo>
-                  <a:pt x="584111" y="2725691"/>
-                  <a:pt x="589926" y="2725691"/>
-                  <a:pt x="595740" y="2714876"/>
-                </a:cubicBezTo>
-                <a:cubicBezTo>
-                  <a:pt x="627722" y="2675228"/>
-                  <a:pt x="598648" y="2581510"/>
-                  <a:pt x="650982" y="2574301"/>
-                </a:cubicBezTo>
-                <a:cubicBezTo>
-                  <a:pt x="709132" y="2567092"/>
-                  <a:pt x="764373" y="2534653"/>
-                  <a:pt x="825429" y="2552674"/>
-                </a:cubicBezTo>
-                <a:cubicBezTo>
-                  <a:pt x="871949" y="2567092"/>
-                  <a:pt x="921375" y="2585115"/>
-                  <a:pt x="970802" y="2585115"/>
-                </a:cubicBezTo>
-                <a:cubicBezTo>
-                  <a:pt x="1023136" y="2585115"/>
-                  <a:pt x="1095822" y="2707668"/>
-                  <a:pt x="1127805" y="2545465"/>
-                </a:cubicBezTo>
-                <a:cubicBezTo>
-                  <a:pt x="1127805" y="2538257"/>
-                  <a:pt x="1217936" y="2556280"/>
-                  <a:pt x="1267362" y="2563488"/>
-                </a:cubicBezTo>
-                <a:cubicBezTo>
-                  <a:pt x="1308067" y="2570698"/>
-                  <a:pt x="1357494" y="2603137"/>
-                  <a:pt x="1386568" y="2538257"/>
-                </a:cubicBezTo>
-                <a:cubicBezTo>
-                  <a:pt x="1401105" y="2498607"/>
-                  <a:pt x="1331326" y="2426518"/>
-                  <a:pt x="1270270" y="2419309"/>
-                </a:cubicBezTo>
-                <a:cubicBezTo>
-                  <a:pt x="1215029" y="2412101"/>
-                  <a:pt x="1159787" y="2404892"/>
-                  <a:pt x="1107453" y="2419309"/>
-                </a:cubicBezTo>
-                <a:cubicBezTo>
-                  <a:pt x="1043489" y="2437331"/>
-                  <a:pt x="1008599" y="2408495"/>
-                  <a:pt x="991154" y="2343615"/>
-                </a:cubicBezTo>
-                <a:cubicBezTo>
-                  <a:pt x="970802" y="2275131"/>
-                  <a:pt x="933005" y="2239085"/>
-                  <a:pt x="880671" y="2206645"/>
-                </a:cubicBezTo>
-                <a:cubicBezTo>
-                  <a:pt x="752743" y="2127346"/>
-                  <a:pt x="630630" y="2033629"/>
-                  <a:pt x="491072" y="1986771"/>
-                </a:cubicBezTo>
-                <a:cubicBezTo>
-                  <a:pt x="464905" y="1979562"/>
-                  <a:pt x="432923" y="1965145"/>
-                  <a:pt x="421293" y="1903868"/>
-                </a:cubicBezTo>
-                <a:cubicBezTo>
-                  <a:pt x="799262" y="1997584"/>
-                  <a:pt x="1142342" y="2239085"/>
-                  <a:pt x="1531941" y="2224667"/>
-                </a:cubicBezTo>
-                <a:cubicBezTo>
-                  <a:pt x="1427272" y="2148974"/>
-                  <a:pt x="1302252" y="2145369"/>
-                  <a:pt x="1188861" y="2091301"/>
-                </a:cubicBezTo>
-                <a:cubicBezTo>
-                  <a:pt x="1270270" y="2051652"/>
-                  <a:pt x="1345864" y="2094906"/>
-                  <a:pt x="1421458" y="2116532"/>
-                </a:cubicBezTo>
-                <a:cubicBezTo>
-                  <a:pt x="1485422" y="2134554"/>
-                  <a:pt x="1543571" y="2138160"/>
-                  <a:pt x="1549386" y="2026420"/>
-                </a:cubicBezTo>
-                <a:cubicBezTo>
-                  <a:pt x="1549386" y="2015607"/>
-                  <a:pt x="1549386" y="2008398"/>
-                  <a:pt x="1549386" y="1997584"/>
-                </a:cubicBezTo>
-                <a:cubicBezTo>
-                  <a:pt x="1526126" y="1950727"/>
-                  <a:pt x="1494144" y="1929099"/>
-                  <a:pt x="1453440" y="1914682"/>
-                </a:cubicBezTo>
-                <a:cubicBezTo>
-                  <a:pt x="1430180" y="1907473"/>
-                  <a:pt x="1398198" y="1893056"/>
-                  <a:pt x="1398198" y="1860614"/>
-                </a:cubicBezTo>
-                <a:cubicBezTo>
-                  <a:pt x="1401105" y="1738063"/>
-                  <a:pt x="1322604" y="1702018"/>
-                  <a:pt x="1247011" y="1665972"/>
-                </a:cubicBezTo>
-                <a:cubicBezTo>
-                  <a:pt x="1287715" y="1604696"/>
-                  <a:pt x="1322604" y="1647950"/>
-                  <a:pt x="1354586" y="1644345"/>
-                </a:cubicBezTo>
-                <a:cubicBezTo>
-                  <a:pt x="1374939" y="1640741"/>
-                  <a:pt x="1395290" y="1637138"/>
-                  <a:pt x="1395290" y="1604696"/>
-                </a:cubicBezTo>
-                <a:cubicBezTo>
-                  <a:pt x="1395290" y="1579465"/>
-                  <a:pt x="1386568" y="1547025"/>
-                  <a:pt x="1366216" y="1547025"/>
-                </a:cubicBezTo>
-                <a:cubicBezTo>
-                  <a:pt x="1238288" y="1543420"/>
-                  <a:pt x="1165601" y="1370405"/>
-                  <a:pt x="1031858" y="1370405"/>
-                </a:cubicBezTo>
-                <a:cubicBezTo>
-                  <a:pt x="950450" y="1370405"/>
-                  <a:pt x="1072563" y="1273083"/>
-                  <a:pt x="1005692" y="1233435"/>
-                </a:cubicBezTo>
-                <a:cubicBezTo>
-                  <a:pt x="991154" y="1222621"/>
-                  <a:pt x="1046396" y="1208203"/>
-                  <a:pt x="1069655" y="1211808"/>
-                </a:cubicBezTo>
-                <a:cubicBezTo>
-                  <a:pt x="1092915" y="1215412"/>
-                  <a:pt x="1113268" y="1240644"/>
-                  <a:pt x="1142342" y="1222621"/>
-                </a:cubicBezTo>
-                <a:cubicBezTo>
-                  <a:pt x="1156879" y="1157741"/>
-                  <a:pt x="1119082" y="1132510"/>
-                  <a:pt x="1084193" y="1114487"/>
-                </a:cubicBezTo>
-                <a:cubicBezTo>
-                  <a:pt x="1008599" y="1071234"/>
-                  <a:pt x="933005" y="1020771"/>
-                  <a:pt x="848689" y="1006353"/>
-                </a:cubicBezTo>
-                <a:cubicBezTo>
-                  <a:pt x="819615" y="1002748"/>
-                  <a:pt x="802169" y="984726"/>
-                  <a:pt x="805077" y="948681"/>
-                </a:cubicBezTo>
-                <a:cubicBezTo>
-                  <a:pt x="810892" y="901822"/>
-                  <a:pt x="839967" y="916240"/>
-                  <a:pt x="863226" y="919844"/>
-                </a:cubicBezTo>
-                <a:cubicBezTo>
-                  <a:pt x="877764" y="923450"/>
-                  <a:pt x="892301" y="934263"/>
-                  <a:pt x="906838" y="909031"/>
-                </a:cubicBezTo>
-                <a:cubicBezTo>
-                  <a:pt x="566666" y="653113"/>
-                  <a:pt x="386404" y="667532"/>
-                  <a:pt x="5527" y="458471"/>
-                </a:cubicBezTo>
-                <a:cubicBezTo>
-                  <a:pt x="89843" y="418822"/>
-                  <a:pt x="150900" y="447658"/>
-                  <a:pt x="209049" y="454867"/>
-                </a:cubicBezTo>
-                <a:cubicBezTo>
-                  <a:pt x="354422" y="472890"/>
-                  <a:pt x="264290" y="505329"/>
-                  <a:pt x="409664" y="526956"/>
-                </a:cubicBezTo>
-                <a:cubicBezTo>
-                  <a:pt x="479443" y="537770"/>
-                  <a:pt x="543407" y="573815"/>
-                  <a:pt x="621908" y="516143"/>
-                </a:cubicBezTo>
-                <a:cubicBezTo>
-                  <a:pt x="674242" y="476494"/>
-                  <a:pt x="758558" y="519747"/>
-                  <a:pt x="822522" y="552188"/>
-                </a:cubicBezTo>
-                <a:cubicBezTo>
-                  <a:pt x="874856" y="581024"/>
-                  <a:pt x="927190" y="588232"/>
-                  <a:pt x="996969" y="552188"/>
-                </a:cubicBezTo>
-                <a:cubicBezTo>
-                  <a:pt x="933005" y="530562"/>
-                  <a:pt x="883579" y="512539"/>
-                  <a:pt x="834151" y="498120"/>
-                </a:cubicBezTo>
-                <a:cubicBezTo>
-                  <a:pt x="793447" y="487307"/>
-                  <a:pt x="770187" y="462076"/>
-                  <a:pt x="773095" y="408008"/>
-                </a:cubicBezTo>
-                <a:cubicBezTo>
-                  <a:pt x="773095" y="379172"/>
-                  <a:pt x="764373" y="339523"/>
-                  <a:pt x="793447" y="325106"/>
-                </a:cubicBezTo>
-                <a:cubicBezTo>
-                  <a:pt x="816707" y="310688"/>
-                  <a:pt x="848689" y="325106"/>
-                  <a:pt x="860319" y="350336"/>
-                </a:cubicBezTo>
-                <a:cubicBezTo>
-                  <a:pt x="874856" y="397195"/>
-                  <a:pt x="889393" y="440449"/>
-                  <a:pt x="938820" y="444054"/>
-                </a:cubicBezTo>
-                <a:cubicBezTo>
-                  <a:pt x="1005692" y="451262"/>
-                  <a:pt x="967894" y="422426"/>
-                  <a:pt x="956265" y="386381"/>
-                </a:cubicBezTo>
-                <a:cubicBezTo>
-                  <a:pt x="944635" y="346733"/>
-                  <a:pt x="979525" y="335919"/>
-                  <a:pt x="1002784" y="343127"/>
-                </a:cubicBezTo>
-                <a:cubicBezTo>
-                  <a:pt x="1090008" y="375569"/>
-                  <a:pt x="1180139" y="317897"/>
-                  <a:pt x="1270270" y="364755"/>
-                </a:cubicBezTo>
-                <a:cubicBezTo>
-                  <a:pt x="1247011" y="249411"/>
-                  <a:pt x="1197583" y="198949"/>
-                  <a:pt x="1092915" y="180926"/>
-                </a:cubicBezTo>
-                <a:cubicBezTo>
-                  <a:pt x="1055118" y="177322"/>
-                  <a:pt x="1014414" y="184530"/>
-                  <a:pt x="979525" y="152090"/>
-                </a:cubicBezTo>
-                <a:cubicBezTo>
-                  <a:pt x="959172" y="134068"/>
-                  <a:pt x="938820" y="112441"/>
-                  <a:pt x="953358" y="76396"/>
-                </a:cubicBezTo>
-                <a:cubicBezTo>
-                  <a:pt x="962080" y="51165"/>
-                  <a:pt x="985339" y="51165"/>
-                  <a:pt x="1005692" y="58373"/>
-                </a:cubicBezTo>
-                <a:cubicBezTo>
-                  <a:pt x="1090008" y="98023"/>
-                  <a:pt x="1180139" y="108837"/>
-                  <a:pt x="1267362" y="123254"/>
-                </a:cubicBezTo>
-                <a:cubicBezTo>
-                  <a:pt x="1281900" y="126859"/>
-                  <a:pt x="1296437" y="134068"/>
-                  <a:pt x="1310975" y="98023"/>
-                </a:cubicBezTo>
-                <a:cubicBezTo>
-                  <a:pt x="1260095" y="81803"/>
-                  <a:pt x="1209941" y="62879"/>
-                  <a:pt x="1159787" y="43505"/>
-                </a:cubicBezTo>
-                <a:close/>
-              </a:path>
-            </a:pathLst>
-          </a:custGeom>
+          </a:prstGeom>
           <a:solidFill>
-            <a:schemeClr val="bg2">
-              <a:alpha val="50000"/>
-            </a:schemeClr>
+            <a:schemeClr val="accent4"/>
           </a:solidFill>
-          <a:ln w="32707" cap="flat">
+          <a:ln>
             <a:noFill/>
-            <a:prstDash val="solid"/>
-            <a:miter/>
           </a:ln>
         </p:spPr>
-        <p:txBody>
-          <a:bodyPr wrap="square" rtlCol="0" anchor="ctr">
-            <a:noAutofit/>
-          </a:bodyPr>
+        <p:style>
+          <a:lnRef idx="2">
+            <a:schemeClr val="accent1">
+              <a:shade val="50000"/>
+            </a:schemeClr>
+          </a:lnRef>
+          <a:fillRef idx="1">
+            <a:schemeClr val="accent1"/>
+          </a:fillRef>
+          <a:effectRef idx="0">
+            <a:schemeClr val="accent1"/>
+          </a:effectRef>
+          <a:fontRef idx="minor">
+            <a:schemeClr val="lt1"/>
+          </a:fontRef>
+        </p:style>
+        <p:txBody>
+          <a:bodyPr rtlCol="0" anchor="ctr"/>
           <a:lstStyle/>
           <a:p>
             <a:pPr algn="ctr"/>
@@ -4772,122 +3902,133 @@
       </p:sp>
       <p:sp>
         <p:nvSpPr>
-          <p:cNvPr id="2" name="Titre 1">
-            <a:extLst>
-              <a:ext uri="{FF2B5EF4-FFF2-40B4-BE49-F238E27FC236}">
-                <a16:creationId xmlns:a16="http://schemas.microsoft.com/office/drawing/2014/main" id="{4018F347-98F0-2EA3-EB71-33E05013476B}"/>
-              </a:ext>
-            </a:extLst>
-          </p:cNvPr>
-          <p:cNvSpPr>
-            <a:spLocks noGrp="1"/>
-          </p:cNvSpPr>
-          <p:nvPr>
-            <p:ph type="title"/>
+          <p:cNvPr id="31" name="Rectangle 30">
+            <a:extLst>
+              <a:ext uri="{FF2B5EF4-FFF2-40B4-BE49-F238E27FC236}">
+                <a16:creationId xmlns:a16="http://schemas.microsoft.com/office/drawing/2014/main" id="{E659831F-0D9A-4C63-9EBB-8435B85A440F}"/>
+              </a:ext>
+              <a:ext uri="{C183D7F6-B498-43B3-948B-1728B52AA6E4}">
+                <adec:decorative xmlns:adec="http://schemas.microsoft.com/office/drawing/2017/decorative" val="1"/>
+              </a:ext>
+            </a:extLst>
+          </p:cNvPr>
+          <p:cNvSpPr>
+            <a:spLocks noGrp="1" noRot="1" noChangeAspect="1" noMove="1" noResize="1" noEditPoints="1" noAdjustHandles="1" noChangeArrowheads="1" noChangeShapeType="1" noTextEdit="1"/>
+          </p:cNvSpPr>
+          <p:nvPr>
+            <p:extLst>
+              <p:ext uri="{386F3935-93C4-4BCD-93E2-E3B085C9AB24}">
+                <p16:designElem xmlns:p16="http://schemas.microsoft.com/office/powerpoint/2015/main" val="1"/>
+              </p:ext>
+            </p:extLst>
           </p:nvPr>
         </p:nvSpPr>
         <p:spPr>
           <a:xfrm>
-            <a:off x="838201" y="643467"/>
-            <a:ext cx="3888526" cy="1800526"/>
+            <a:off x="0" y="2203079"/>
+            <a:ext cx="11383362" cy="4267991"/>
+          </a:xfrm>
+          <a:prstGeom prst="rect">
+            <a:avLst/>
+          </a:prstGeom>
+          <a:solidFill>
+            <a:schemeClr val="bg1"/>
+          </a:solidFill>
+          <a:ln>
+            <a:noFill/>
+          </a:ln>
+          <a:effectLst>
+            <a:outerShdw blurRad="139700" dist="127000" dir="5400000" algn="t" rotWithShape="0">
+              <a:prstClr val="black">
+                <a:alpha val="15000"/>
+              </a:prstClr>
+            </a:outerShdw>
+          </a:effectLst>
+        </p:spPr>
+        <p:style>
+          <a:lnRef idx="2">
+            <a:schemeClr val="accent1">
+              <a:shade val="50000"/>
+            </a:schemeClr>
+          </a:lnRef>
+          <a:fillRef idx="1">
+            <a:schemeClr val="accent1"/>
+          </a:fillRef>
+          <a:effectRef idx="0">
+            <a:schemeClr val="accent1"/>
+          </a:effectRef>
+          <a:fontRef idx="minor">
+            <a:schemeClr val="lt1"/>
+          </a:fontRef>
+        </p:style>
+        <p:txBody>
+          <a:bodyPr rtlCol="0" anchor="ctr"/>
+          <a:lstStyle/>
+          <a:p>
+            <a:pPr algn="ctr"/>
+            <a:endParaRPr lang="en-US"/>
+          </a:p>
+        </p:txBody>
+      </p:sp>
+      <p:sp>
+        <p:nvSpPr>
+          <p:cNvPr id="3" name="Espace réservé du contenu 2">
+            <a:extLst>
+              <a:ext uri="{FF2B5EF4-FFF2-40B4-BE49-F238E27FC236}">
+                <a16:creationId xmlns:a16="http://schemas.microsoft.com/office/drawing/2014/main" id="{603B17BC-88EF-17BD-36F4-4C0A21121606}"/>
+              </a:ext>
+            </a:extLst>
+          </p:cNvPr>
+          <p:cNvSpPr>
+            <a:spLocks noGrp="1"/>
+          </p:cNvSpPr>
+          <p:nvPr>
+            <p:ph idx="1"/>
+          </p:nvPr>
+        </p:nvSpPr>
+        <p:spPr>
+          <a:xfrm>
+            <a:off x="793661" y="2599509"/>
+            <a:ext cx="4530898" cy="3639450"/>
           </a:xfrm>
         </p:spPr>
         <p:txBody>
-          <a:bodyPr>
+          <a:bodyPr anchor="ctr">
             <a:normAutofit/>
           </a:bodyPr>
           <a:lstStyle/>
           <a:p>
             <a:r>
-              <a:rPr lang="fr-FR" b="1"/>
-              <a:t>Objectif</a:t>
-            </a:r>
-            <a:endParaRPr lang="es-AR" dirty="0"/>
-          </a:p>
-        </p:txBody>
-      </p:sp>
-      <p:sp>
-        <p:nvSpPr>
-          <p:cNvPr id="3" name="Espace réservé du contenu 2">
-            <a:extLst>
-              <a:ext uri="{FF2B5EF4-FFF2-40B4-BE49-F238E27FC236}">
-                <a16:creationId xmlns:a16="http://schemas.microsoft.com/office/drawing/2014/main" id="{603B17BC-88EF-17BD-36F4-4C0A21121606}"/>
-              </a:ext>
-            </a:extLst>
-          </p:cNvPr>
-          <p:cNvSpPr>
-            <a:spLocks noGrp="1"/>
-          </p:cNvSpPr>
-          <p:nvPr>
-            <p:ph idx="1"/>
-          </p:nvPr>
-        </p:nvSpPr>
-        <p:spPr>
-          <a:xfrm>
-            <a:off x="838201" y="2623381"/>
-            <a:ext cx="3888528" cy="3553581"/>
-          </a:xfrm>
-        </p:spPr>
-        <p:txBody>
-          <a:bodyPr>
-            <a:normAutofit/>
-          </a:bodyPr>
-          <a:lstStyle/>
-          <a:p>
+              <a:rPr lang="fr-FR" sz="2000" dirty="0"/>
+              <a:t>du modèle 3D </a:t>
+            </a:r>
             <a:r>
               <a:rPr lang="fr-FR" sz="2000"/>
-              <a:t>Automatiser une </a:t>
-            </a:r>
-            <a:r>
-              <a:rPr lang="fr-FR" sz="2000" b="1"/>
-              <a:t>première estimation de prix</a:t>
-            </a:r>
-            <a:r>
-              <a:rPr lang="fr-FR" sz="2000"/>
-              <a:t> à partir :</a:t>
-            </a:r>
-            <a:br>
-              <a:rPr lang="fr-FR" sz="2000"/>
-            </a:br>
-            <a:r>
-              <a:rPr lang="fr-FR" sz="2000"/>
-              <a:t>-du modèle 3D Vectorworks</a:t>
-            </a:r>
-            <a:br>
-              <a:rPr lang="fr-FR" sz="2000"/>
-            </a:br>
-            <a:r>
-              <a:rPr lang="fr-FR" sz="2000"/>
-              <a:t>-d’une image du meuble</a:t>
-            </a:r>
-            <a:br>
-              <a:rPr lang="fr-FR" sz="2000"/>
-            </a:br>
-            <a:r>
-              <a:rPr lang="fr-FR" sz="2000"/>
-              <a:t>-des matériaux utilisés</a:t>
-            </a:r>
-            <a:br>
-              <a:rPr lang="fr-FR" sz="2000"/>
-            </a:br>
-            <a:r>
-              <a:rPr lang="fr-FR" sz="2000"/>
-              <a:t>En s’appuyant sur un </a:t>
-            </a:r>
-            <a:r>
-              <a:rPr lang="fr-FR" sz="2000" b="1"/>
-              <a:t>LLM (Gemini)</a:t>
-            </a:r>
-            <a:endParaRPr lang="es-AR" sz="2000"/>
+              <a:t>Vectorworks</a:t>
+            </a:r>
+            <a:endParaRPr lang="fr-FR" sz="2000" dirty="0"/>
+          </a:p>
+          <a:p>
+            <a:r>
+              <a:rPr lang="fr-FR" sz="2000" dirty="0"/>
+              <a:t>d’une image du meuble</a:t>
+            </a:r>
+          </a:p>
+          <a:p>
+            <a:r>
+              <a:rPr lang="fr-FR" sz="2000" dirty="0"/>
+              <a:t>des matériaux utilisés</a:t>
+            </a:r>
+            <a:endParaRPr lang="es-AR" sz="2000" dirty="0"/>
           </a:p>
         </p:txBody>
       </p:sp>
       <p:pic>
         <p:nvPicPr>
-          <p:cNvPr id="5" name="Image 4" descr="Une image contenant texte, capture d’écran, Police, conception&#10;&#10;Le contenu généré par l’IA peut être incorrect.">
-            <a:extLst>
-              <a:ext uri="{FF2B5EF4-FFF2-40B4-BE49-F238E27FC236}">
-                <a16:creationId xmlns:a16="http://schemas.microsoft.com/office/drawing/2014/main" id="{CE9CAE86-1DD4-92E3-F79F-D0FD56BB5415}"/>
+          <p:cNvPr id="7" name="Image 6" descr="Une image contenant texte, capture d’écran, Police&#10;&#10;Le contenu généré par l’IA peut être incorrect.">
+            <a:extLst>
+              <a:ext uri="{FF2B5EF4-FFF2-40B4-BE49-F238E27FC236}">
+                <a16:creationId xmlns:a16="http://schemas.microsoft.com/office/drawing/2014/main" id="{862AABC5-ED40-7A05-C43B-B994EFF5DC7F}"/>
               </a:ext>
             </a:extLst>
           </p:cNvPr>
@@ -4910,14 +4051,77 @@
         </p:blipFill>
         <p:spPr>
           <a:xfrm>
-            <a:off x="7167193" y="467065"/>
-            <a:ext cx="4031910" cy="5599876"/>
+            <a:off x="5911532" y="2525904"/>
+            <a:ext cx="5150277" cy="3630945"/>
           </a:xfrm>
           <a:prstGeom prst="rect">
             <a:avLst/>
           </a:prstGeom>
         </p:spPr>
       </p:pic>
+      <p:sp>
+        <p:nvSpPr>
+          <p:cNvPr id="33" name="Rectangle 32">
+            <a:extLst>
+              <a:ext uri="{FF2B5EF4-FFF2-40B4-BE49-F238E27FC236}">
+                <a16:creationId xmlns:a16="http://schemas.microsoft.com/office/drawing/2014/main" id="{E6995CE5-F890-4ABA-82A2-26507CE8D2A3}"/>
+              </a:ext>
+              <a:ext uri="{C183D7F6-B498-43B3-948B-1728B52AA6E4}">
+                <adec:decorative xmlns:adec="http://schemas.microsoft.com/office/drawing/2017/decorative" val="1"/>
+              </a:ext>
+            </a:extLst>
+          </p:cNvPr>
+          <p:cNvSpPr>
+            <a:spLocks noGrp="1" noRot="1" noChangeAspect="1" noMove="1" noResize="1" noEditPoints="1" noAdjustHandles="1" noChangeArrowheads="1" noChangeShapeType="1" noTextEdit="1"/>
+          </p:cNvSpPr>
+          <p:nvPr>
+            <p:extLst>
+              <p:ext uri="{386F3935-93C4-4BCD-93E2-E3B085C9AB24}">
+                <p16:designElem xmlns:p16="http://schemas.microsoft.com/office/powerpoint/2015/main" val="1"/>
+              </p:ext>
+            </p:extLst>
+          </p:nvPr>
+        </p:nvSpPr>
+        <p:spPr>
+          <a:xfrm rot="5400000">
+            <a:off x="11228040" y="2313027"/>
+            <a:ext cx="781700" cy="152382"/>
+          </a:xfrm>
+          <a:prstGeom prst="rect">
+            <a:avLst/>
+          </a:prstGeom>
+          <a:solidFill>
+            <a:schemeClr val="accent4"/>
+          </a:solidFill>
+          <a:ln>
+            <a:noFill/>
+          </a:ln>
+        </p:spPr>
+        <p:style>
+          <a:lnRef idx="2">
+            <a:schemeClr val="accent1">
+              <a:shade val="50000"/>
+            </a:schemeClr>
+          </a:lnRef>
+          <a:fillRef idx="1">
+            <a:schemeClr val="accent1"/>
+          </a:fillRef>
+          <a:effectRef idx="0">
+            <a:schemeClr val="accent1"/>
+          </a:effectRef>
+          <a:fontRef idx="minor">
+            <a:schemeClr val="lt1"/>
+          </a:fontRef>
+        </p:style>
+        <p:txBody>
+          <a:bodyPr rtlCol="0" anchor="ctr"/>
+          <a:lstStyle/>
+          <a:p>
+            <a:pPr algn="ctr"/>
+            <a:endParaRPr lang="en-US"/>
+          </a:p>
+        </p:txBody>
+      </p:sp>
       <p:sp>
         <p:nvSpPr>
           <p:cNvPr id="6" name="Rectangle 5">
@@ -4988,6 +4192,14 @@
 <file path=ppt/slides/slide3.xml><?xml version="1.0" encoding="utf-8"?>
 <p:sld xmlns:a="http://schemas.openxmlformats.org/drawingml/2006/main" xmlns:r="http://schemas.openxmlformats.org/officeDocument/2006/relationships" xmlns:p="http://schemas.openxmlformats.org/presentationml/2006/main">
   <p:cSld>
+    <p:bg>
+      <p:bgPr>
+        <a:solidFill>
+          <a:schemeClr val="bg1"/>
+        </a:solidFill>
+        <a:effectLst/>
+      </p:bgPr>
+    </p:bg>
     <p:spTree>
       <p:nvGrpSpPr>
         <p:cNvPr id="1" name=""/>
@@ -5002,6 +4214,66 @@
           <a:chExt cx="0" cy="0"/>
         </a:xfrm>
       </p:grpSpPr>
+      <p:sp useBgFill="1">
+        <p:nvSpPr>
+          <p:cNvPr id="21" name="Rectangle 20">
+            <a:extLst>
+              <a:ext uri="{FF2B5EF4-FFF2-40B4-BE49-F238E27FC236}">
+                <a16:creationId xmlns:a16="http://schemas.microsoft.com/office/drawing/2014/main" id="{058A14AF-9FB5-4CC7-BA35-E8E85D3EDF0E}"/>
+              </a:ext>
+              <a:ext uri="{C183D7F6-B498-43B3-948B-1728B52AA6E4}">
+                <adec:decorative xmlns:adec="http://schemas.microsoft.com/office/drawing/2017/decorative" val="1"/>
+              </a:ext>
+            </a:extLst>
+          </p:cNvPr>
+          <p:cNvSpPr>
+            <a:spLocks noGrp="1" noRot="1" noChangeAspect="1" noMove="1" noResize="1" noEditPoints="1" noAdjustHandles="1" noChangeArrowheads="1" noChangeShapeType="1" noTextEdit="1"/>
+          </p:cNvSpPr>
+          <p:nvPr>
+            <p:extLst>
+              <p:ext uri="{386F3935-93C4-4BCD-93E2-E3B085C9AB24}">
+                <p16:designElem xmlns:p16="http://schemas.microsoft.com/office/powerpoint/2015/main" val="1"/>
+              </p:ext>
+            </p:extLst>
+          </p:nvPr>
+        </p:nvSpPr>
+        <p:spPr>
+          <a:xfrm>
+            <a:off x="0" y="0"/>
+            <a:ext cx="12191999" cy="6857365"/>
+          </a:xfrm>
+          <a:prstGeom prst="rect">
+            <a:avLst/>
+          </a:prstGeom>
+          <a:ln>
+            <a:noFill/>
+          </a:ln>
+        </p:spPr>
+        <p:style>
+          <a:lnRef idx="2">
+            <a:schemeClr val="accent1">
+              <a:shade val="50000"/>
+            </a:schemeClr>
+          </a:lnRef>
+          <a:fillRef idx="1">
+            <a:schemeClr val="accent1"/>
+          </a:fillRef>
+          <a:effectRef idx="0">
+            <a:schemeClr val="accent1"/>
+          </a:effectRef>
+          <a:fontRef idx="minor">
+            <a:schemeClr val="lt1"/>
+          </a:fontRef>
+        </p:style>
+        <p:txBody>
+          <a:bodyPr rtlCol="0" anchor="ctr"/>
+          <a:lstStyle/>
+          <a:p>
+            <a:pPr algn="ctr"/>
+            <a:endParaRPr lang="en-US"/>
+          </a:p>
+        </p:txBody>
+      </p:sp>
       <p:sp>
         <p:nvSpPr>
           <p:cNvPr id="2" name="Titre 1">
@@ -5018,20 +4290,156 @@
             <p:ph type="title"/>
           </p:nvPr>
         </p:nvSpPr>
-        <p:spPr/>
-        <p:txBody>
-          <a:bodyPr/>
-          <a:lstStyle/>
-          <a:p>
-            <a:r>
-              <a:rPr lang="fr-FR" b="1" dirty="0"/>
-              <a:t>Étape 1 : Préparation dans </a:t>
-            </a:r>
-            <a:r>
-              <a:rPr lang="fr-FR" b="1" dirty="0" err="1"/>
-              <a:t>Vectorworks</a:t>
-            </a:r>
-            <a:endParaRPr lang="es-AR" dirty="0"/>
+        <p:spPr>
+          <a:xfrm>
+            <a:off x="793662" y="386930"/>
+            <a:ext cx="10066122" cy="1298448"/>
+          </a:xfrm>
+        </p:spPr>
+        <p:txBody>
+          <a:bodyPr anchor="b">
+            <a:normAutofit/>
+          </a:bodyPr>
+          <a:lstStyle/>
+          <a:p>
+            <a:r>
+              <a:rPr lang="fr-FR" b="1"/>
+              <a:t>Étape 1 : Préparation dans Vectorworks</a:t>
+            </a:r>
+            <a:endParaRPr lang="es-AR"/>
+          </a:p>
+        </p:txBody>
+      </p:sp>
+      <p:sp>
+        <p:nvSpPr>
+          <p:cNvPr id="23" name="Rectangle 22">
+            <a:extLst>
+              <a:ext uri="{FF2B5EF4-FFF2-40B4-BE49-F238E27FC236}">
+                <a16:creationId xmlns:a16="http://schemas.microsoft.com/office/drawing/2014/main" id="{3A9A4357-BD1D-4622-A4FE-766E6AB8DE84}"/>
+              </a:ext>
+              <a:ext uri="{C183D7F6-B498-43B3-948B-1728B52AA6E4}">
+                <adec:decorative xmlns:adec="http://schemas.microsoft.com/office/drawing/2017/decorative" val="1"/>
+              </a:ext>
+            </a:extLst>
+          </p:cNvPr>
+          <p:cNvSpPr>
+            <a:spLocks noGrp="1" noRot="1" noChangeAspect="1" noMove="1" noResize="1" noEditPoints="1" noAdjustHandles="1" noChangeArrowheads="1" noChangeShapeType="1" noTextEdit="1"/>
+          </p:cNvSpPr>
+          <p:nvPr>
+            <p:extLst>
+              <p:ext uri="{386F3935-93C4-4BCD-93E2-E3B085C9AB24}">
+                <p16:designElem xmlns:p16="http://schemas.microsoft.com/office/powerpoint/2015/main" val="1"/>
+              </p:ext>
+            </p:extLst>
+          </p:nvPr>
+        </p:nvSpPr>
+        <p:spPr>
+          <a:xfrm flipH="1" flipV="1">
+            <a:off x="-2" y="1998845"/>
+            <a:ext cx="11454595" cy="781699"/>
+          </a:xfrm>
+          <a:prstGeom prst="rect">
+            <a:avLst/>
+          </a:prstGeom>
+          <a:solidFill>
+            <a:schemeClr val="accent4"/>
+          </a:solidFill>
+          <a:ln>
+            <a:noFill/>
+          </a:ln>
+        </p:spPr>
+        <p:style>
+          <a:lnRef idx="2">
+            <a:schemeClr val="accent1">
+              <a:shade val="50000"/>
+            </a:schemeClr>
+          </a:lnRef>
+          <a:fillRef idx="1">
+            <a:schemeClr val="accent1"/>
+          </a:fillRef>
+          <a:effectRef idx="0">
+            <a:schemeClr val="accent1"/>
+          </a:effectRef>
+          <a:fontRef idx="minor">
+            <a:schemeClr val="lt1"/>
+          </a:fontRef>
+        </p:style>
+        <p:txBody>
+          <a:bodyPr rtlCol="0" anchor="ctr"/>
+          <a:lstStyle/>
+          <a:p>
+            <a:pPr algn="ctr"/>
+            <a:endParaRPr lang="en-US"/>
+          </a:p>
+        </p:txBody>
+      </p:sp>
+      <p:sp>
+        <p:nvSpPr>
+          <p:cNvPr id="25" name="Rectangle 24">
+            <a:extLst>
+              <a:ext uri="{FF2B5EF4-FFF2-40B4-BE49-F238E27FC236}">
+                <a16:creationId xmlns:a16="http://schemas.microsoft.com/office/drawing/2014/main" id="{E659831F-0D9A-4C63-9EBB-8435B85A440F}"/>
+              </a:ext>
+              <a:ext uri="{C183D7F6-B498-43B3-948B-1728B52AA6E4}">
+                <adec:decorative xmlns:adec="http://schemas.microsoft.com/office/drawing/2017/decorative" val="1"/>
+              </a:ext>
+            </a:extLst>
+          </p:cNvPr>
+          <p:cNvSpPr>
+            <a:spLocks noGrp="1" noRot="1" noChangeAspect="1" noMove="1" noResize="1" noEditPoints="1" noAdjustHandles="1" noChangeArrowheads="1" noChangeShapeType="1" noTextEdit="1"/>
+          </p:cNvSpPr>
+          <p:nvPr>
+            <p:extLst>
+              <p:ext uri="{386F3935-93C4-4BCD-93E2-E3B085C9AB24}">
+                <p16:designElem xmlns:p16="http://schemas.microsoft.com/office/powerpoint/2015/main" val="1"/>
+              </p:ext>
+            </p:extLst>
+          </p:nvPr>
+        </p:nvSpPr>
+        <p:spPr>
+          <a:xfrm>
+            <a:off x="0" y="2203079"/>
+            <a:ext cx="11383362" cy="4267991"/>
+          </a:xfrm>
+          <a:prstGeom prst="rect">
+            <a:avLst/>
+          </a:prstGeom>
+          <a:solidFill>
+            <a:schemeClr val="bg1"/>
+          </a:solidFill>
+          <a:ln>
+            <a:noFill/>
+          </a:ln>
+          <a:effectLst>
+            <a:outerShdw blurRad="139700" dist="127000" dir="5400000" algn="t" rotWithShape="0">
+              <a:prstClr val="black">
+                <a:alpha val="15000"/>
+              </a:prstClr>
+            </a:outerShdw>
+          </a:effectLst>
+        </p:spPr>
+        <p:style>
+          <a:lnRef idx="2">
+            <a:schemeClr val="accent1">
+              <a:shade val="50000"/>
+            </a:schemeClr>
+          </a:lnRef>
+          <a:fillRef idx="1">
+            <a:schemeClr val="accent1"/>
+          </a:fillRef>
+          <a:effectRef idx="0">
+            <a:schemeClr val="accent1"/>
+          </a:effectRef>
+          <a:fontRef idx="minor">
+            <a:schemeClr val="lt1"/>
+          </a:fontRef>
+        </p:style>
+        <p:txBody>
+          <a:bodyPr rtlCol="0" anchor="ctr"/>
+          <a:lstStyle/>
+          <a:p>
+            <a:pPr algn="ctr"/>
+            <a:endParaRPr lang="en-US"/>
           </a:p>
         </p:txBody>
       </p:sp>
@@ -5051,57 +4459,155 @@
             <p:ph idx="1"/>
           </p:nvPr>
         </p:nvSpPr>
-        <p:spPr/>
-        <p:txBody>
-          <a:bodyPr/>
-          <a:lstStyle/>
-          <a:p>
-            <a:r>
-              <a:rPr lang="fr-FR" b="1" dirty="0"/>
+        <p:spPr>
+          <a:xfrm>
+            <a:off x="793661" y="2599509"/>
+            <a:ext cx="4530898" cy="3639450"/>
+          </a:xfrm>
+        </p:spPr>
+        <p:txBody>
+          <a:bodyPr anchor="ctr">
+            <a:normAutofit/>
+          </a:bodyPr>
+          <a:lstStyle/>
+          <a:p>
+            <a:r>
+              <a:rPr lang="fr-FR" sz="2000" dirty="0"/>
               <a:t>Isoler la pièce</a:t>
             </a:r>
-            <a:endParaRPr lang="fr-FR" dirty="0"/>
-          </a:p>
-          <a:p>
-            <a:r>
-              <a:rPr lang="fr-FR" b="1" dirty="0"/>
-              <a:t>Export STL</a:t>
-            </a:r>
-            <a:endParaRPr lang="fr-FR" dirty="0"/>
-          </a:p>
-          <a:p>
-            <a:r>
-              <a:rPr lang="fr-FR" dirty="0"/>
+          </a:p>
+          <a:p>
+            <a:r>
+              <a:rPr lang="fr-FR" sz="2000" dirty="0"/>
               <a:t>Export de la pièce au format </a:t>
             </a:r>
             <a:r>
-              <a:rPr lang="fr-FR" b="1" dirty="0"/>
+              <a:rPr lang="fr-FR" sz="2000" b="1" dirty="0"/>
               <a:t>STL</a:t>
             </a:r>
-            <a:endParaRPr lang="fr-FR" dirty="0"/>
-          </a:p>
-          <a:p>
-            <a:r>
-              <a:rPr lang="fr-FR" dirty="0"/>
+            <a:endParaRPr lang="fr-FR" sz="2000" dirty="0"/>
+          </a:p>
+          <a:p>
+            <a:r>
+              <a:rPr lang="fr-FR" sz="2000" dirty="0"/>
               <a:t>Ce fichier contient :</a:t>
             </a:r>
           </a:p>
           <a:p>
             <a:pPr lvl="1"/>
             <a:r>
-              <a:rPr lang="fr-FR" dirty="0"/>
+              <a:rPr lang="fr-FR" sz="2000" dirty="0"/>
               <a:t>la géométrie 3D</a:t>
             </a:r>
           </a:p>
           <a:p>
             <a:pPr lvl="1"/>
             <a:r>
-              <a:rPr lang="fr-FR" dirty="0"/>
+              <a:rPr lang="fr-FR" sz="2000" dirty="0"/>
               <a:t>le volume de la pièce (utile pour estimer matière, temps machine, etc.)</a:t>
             </a:r>
           </a:p>
           <a:p>
-            <a:endParaRPr lang="es-AR" dirty="0"/>
+            <a:endParaRPr lang="es-AR" sz="2000" dirty="0"/>
+          </a:p>
+        </p:txBody>
+      </p:sp>
+      <p:pic>
+        <p:nvPicPr>
+          <p:cNvPr id="6" name="Image 5" descr="Une image contenant conception&#10;&#10;Le contenu généré par l’IA peut être incorrect.">
+            <a:extLst>
+              <a:ext uri="{FF2B5EF4-FFF2-40B4-BE49-F238E27FC236}">
+                <a16:creationId xmlns:a16="http://schemas.microsoft.com/office/drawing/2014/main" id="{0CB160FC-9243-5698-05E9-163B01D68445}"/>
+              </a:ext>
+            </a:extLst>
+          </p:cNvPr>
+          <p:cNvPicPr>
+            <a:picLocks noChangeAspect="1"/>
+          </p:cNvPicPr>
+          <p:nvPr/>
+        </p:nvPicPr>
+        <p:blipFill>
+          <a:blip r:embed="rId2">
+            <a:extLst>
+              <a:ext uri="{28A0092B-C50C-407E-A947-70E740481C1C}">
+                <a14:useLocalDpi xmlns:a14="http://schemas.microsoft.com/office/drawing/2010/main" val="0"/>
+              </a:ext>
+            </a:extLst>
+          </a:blip>
+          <a:stretch>
+            <a:fillRect/>
+          </a:stretch>
+        </p:blipFill>
+        <p:spPr>
+          <a:xfrm>
+            <a:off x="6105745" y="2484255"/>
+            <a:ext cx="4761851" cy="3714244"/>
+          </a:xfrm>
+          <a:prstGeom prst="rect">
+            <a:avLst/>
+          </a:prstGeom>
+        </p:spPr>
+      </p:pic>
+      <p:sp>
+        <p:nvSpPr>
+          <p:cNvPr id="27" name="Rectangle 26">
+            <a:extLst>
+              <a:ext uri="{FF2B5EF4-FFF2-40B4-BE49-F238E27FC236}">
+                <a16:creationId xmlns:a16="http://schemas.microsoft.com/office/drawing/2014/main" id="{E6995CE5-F890-4ABA-82A2-26507CE8D2A3}"/>
+              </a:ext>
+              <a:ext uri="{C183D7F6-B498-43B3-948B-1728B52AA6E4}">
+                <adec:decorative xmlns:adec="http://schemas.microsoft.com/office/drawing/2017/decorative" val="1"/>
+              </a:ext>
+            </a:extLst>
+          </p:cNvPr>
+          <p:cNvSpPr>
+            <a:spLocks noGrp="1" noRot="1" noChangeAspect="1" noMove="1" noResize="1" noEditPoints="1" noAdjustHandles="1" noChangeArrowheads="1" noChangeShapeType="1" noTextEdit="1"/>
+          </p:cNvSpPr>
+          <p:nvPr>
+            <p:extLst>
+              <p:ext uri="{386F3935-93C4-4BCD-93E2-E3B085C9AB24}">
+                <p16:designElem xmlns:p16="http://schemas.microsoft.com/office/powerpoint/2015/main" val="1"/>
+              </p:ext>
+            </p:extLst>
+          </p:nvPr>
+        </p:nvSpPr>
+        <p:spPr>
+          <a:xfrm rot="5400000">
+            <a:off x="11228040" y="2313027"/>
+            <a:ext cx="781700" cy="152382"/>
+          </a:xfrm>
+          <a:prstGeom prst="rect">
+            <a:avLst/>
+          </a:prstGeom>
+          <a:solidFill>
+            <a:schemeClr val="accent4"/>
+          </a:solidFill>
+          <a:ln>
+            <a:noFill/>
+          </a:ln>
+        </p:spPr>
+        <p:style>
+          <a:lnRef idx="2">
+            <a:schemeClr val="accent1">
+              <a:shade val="50000"/>
+            </a:schemeClr>
+          </a:lnRef>
+          <a:fillRef idx="1">
+            <a:schemeClr val="accent1"/>
+          </a:fillRef>
+          <a:effectRef idx="0">
+            <a:schemeClr val="accent1"/>
+          </a:effectRef>
+          <a:fontRef idx="minor">
+            <a:schemeClr val="lt1"/>
+          </a:fontRef>
+        </p:style>
+        <p:txBody>
+          <a:bodyPr rtlCol="0" anchor="ctr"/>
+          <a:lstStyle/>
+          <a:p>
+            <a:pPr algn="ctr"/>
+            <a:endParaRPr lang="en-US"/>
           </a:p>
         </p:txBody>
       </p:sp>
@@ -5121,6 +4627,14 @@
 <file path=ppt/slides/slide4.xml><?xml version="1.0" encoding="utf-8"?>
 <p:sld xmlns:a="http://schemas.openxmlformats.org/drawingml/2006/main" xmlns:r="http://schemas.openxmlformats.org/officeDocument/2006/relationships" xmlns:p="http://schemas.openxmlformats.org/presentationml/2006/main">
   <p:cSld>
+    <p:bg>
+      <p:bgPr>
+        <a:solidFill>
+          <a:schemeClr val="bg1"/>
+        </a:solidFill>
+        <a:effectLst/>
+      </p:bgPr>
+    </p:bg>
     <p:spTree>
       <p:nvGrpSpPr>
         <p:cNvPr id="1" name=""/>
@@ -5135,6 +4649,289 @@
           <a:chExt cx="0" cy="0"/>
         </a:xfrm>
       </p:grpSpPr>
+      <p:sp useBgFill="1">
+        <p:nvSpPr>
+          <p:cNvPr id="25" name="Rectangle 24">
+            <a:extLst>
+              <a:ext uri="{FF2B5EF4-FFF2-40B4-BE49-F238E27FC236}">
+                <a16:creationId xmlns:a16="http://schemas.microsoft.com/office/drawing/2014/main" id="{EF4CB1B7-AF26-4C13-8E7D-0489A31E4B7F}"/>
+              </a:ext>
+              <a:ext uri="{C183D7F6-B498-43B3-948B-1728B52AA6E4}">
+                <adec:decorative xmlns:adec="http://schemas.microsoft.com/office/drawing/2017/decorative" val="1"/>
+              </a:ext>
+            </a:extLst>
+          </p:cNvPr>
+          <p:cNvSpPr>
+            <a:spLocks noGrp="1" noRot="1" noChangeAspect="1" noMove="1" noResize="1" noEditPoints="1" noAdjustHandles="1" noChangeArrowheads="1" noChangeShapeType="1" noTextEdit="1"/>
+          </p:cNvSpPr>
+          <p:nvPr>
+            <p:extLst>
+              <p:ext uri="{386F3935-93C4-4BCD-93E2-E3B085C9AB24}">
+                <p16:designElem xmlns:p16="http://schemas.microsoft.com/office/powerpoint/2015/main" val="1"/>
+              </p:ext>
+            </p:extLst>
+          </p:nvPr>
+        </p:nvSpPr>
+        <p:spPr>
+          <a:xfrm>
+            <a:off x="0" y="0"/>
+            <a:ext cx="12191999" cy="6857365"/>
+          </a:xfrm>
+          <a:prstGeom prst="rect">
+            <a:avLst/>
+          </a:prstGeom>
+          <a:ln>
+            <a:noFill/>
+          </a:ln>
+        </p:spPr>
+        <p:style>
+          <a:lnRef idx="2">
+            <a:schemeClr val="accent1">
+              <a:shade val="50000"/>
+            </a:schemeClr>
+          </a:lnRef>
+          <a:fillRef idx="1">
+            <a:schemeClr val="accent1"/>
+          </a:fillRef>
+          <a:effectRef idx="0">
+            <a:schemeClr val="accent1"/>
+          </a:effectRef>
+          <a:fontRef idx="minor">
+            <a:schemeClr val="lt1"/>
+          </a:fontRef>
+        </p:style>
+        <p:txBody>
+          <a:bodyPr rtlCol="0" anchor="ctr"/>
+          <a:lstStyle/>
+          <a:p>
+            <a:pPr algn="ctr"/>
+            <a:endParaRPr lang="en-US"/>
+          </a:p>
+        </p:txBody>
+      </p:sp>
+      <p:grpSp>
+        <p:nvGrpSpPr>
+          <p:cNvPr id="27" name="Group 26">
+            <a:extLst>
+              <a:ext uri="{FF2B5EF4-FFF2-40B4-BE49-F238E27FC236}">
+                <a16:creationId xmlns:a16="http://schemas.microsoft.com/office/drawing/2014/main" id="{19A6B5CE-CB1D-48EE-8B43-E952235C8371}"/>
+              </a:ext>
+              <a:ext uri="{C183D7F6-B498-43B3-948B-1728B52AA6E4}">
+                <adec:decorative xmlns:adec="http://schemas.microsoft.com/office/drawing/2017/decorative" val="1"/>
+              </a:ext>
+            </a:extLst>
+          </p:cNvPr>
+          <p:cNvGrpSpPr>
+            <a:grpSpLocks noGrp="1" noUngrp="1" noRot="1" noChangeAspect="1" noMove="1" noResize="1"/>
+          </p:cNvGrpSpPr>
+          <p:nvPr>
+            <p:extLst>
+              <p:ext uri="{386F3935-93C4-4BCD-93E2-E3B085C9AB24}">
+                <p16:designElem xmlns:p16="http://schemas.microsoft.com/office/powerpoint/2015/main" val="1"/>
+              </p:ext>
+            </p:extLst>
+          </p:nvPr>
+        </p:nvGrpSpPr>
+        <p:grpSpPr>
+          <a:xfrm rot="5400000">
+            <a:off x="-2340441" y="2666183"/>
+            <a:ext cx="5860051" cy="527712"/>
+            <a:chOff x="6081624" y="1998368"/>
+            <a:chExt cx="5613457" cy="782175"/>
+          </a:xfrm>
+          <a:solidFill>
+            <a:schemeClr val="accent4"/>
+          </a:solidFill>
+        </p:grpSpPr>
+        <p:sp>
+          <p:nvSpPr>
+            <p:cNvPr id="28" name="Rectangle 27">
+              <a:extLst>
+                <a:ext uri="{FF2B5EF4-FFF2-40B4-BE49-F238E27FC236}">
+                  <a16:creationId xmlns:a16="http://schemas.microsoft.com/office/drawing/2014/main" id="{E3F3EAA5-4E15-400B-BBA3-82B3F49A2178}"/>
+                </a:ext>
+                <a:ext uri="{C183D7F6-B498-43B3-948B-1728B52AA6E4}">
+                  <adec:decorative xmlns:adec="http://schemas.microsoft.com/office/drawing/2017/decorative" val="1"/>
+                </a:ext>
+              </a:extLst>
+            </p:cNvPr>
+            <p:cNvSpPr/>
+            <p:nvPr>
+              <p:extLst>
+                <p:ext uri="{386F3935-93C4-4BCD-93E2-E3B085C9AB24}">
+                  <p16:designElem xmlns:p16="http://schemas.microsoft.com/office/powerpoint/2015/main" val="1"/>
+                </p:ext>
+              </p:extLst>
+            </p:nvPr>
+          </p:nvSpPr>
+          <p:spPr>
+            <a:xfrm rot="5400000">
+              <a:off x="11228040" y="2313027"/>
+              <a:ext cx="781700" cy="152382"/>
+            </a:xfrm>
+            <a:prstGeom prst="rect">
+              <a:avLst/>
+            </a:prstGeom>
+            <a:grpFill/>
+            <a:ln>
+              <a:noFill/>
+            </a:ln>
+          </p:spPr>
+          <p:style>
+            <a:lnRef idx="2">
+              <a:schemeClr val="accent1">
+                <a:shade val="50000"/>
+              </a:schemeClr>
+            </a:lnRef>
+            <a:fillRef idx="1">
+              <a:schemeClr val="accent1"/>
+            </a:fillRef>
+            <a:effectRef idx="0">
+              <a:schemeClr val="accent1"/>
+            </a:effectRef>
+            <a:fontRef idx="minor">
+              <a:schemeClr val="lt1"/>
+            </a:fontRef>
+          </p:style>
+          <p:txBody>
+            <a:bodyPr rtlCol="0" anchor="ctr"/>
+            <a:lstStyle/>
+            <a:p>
+              <a:pPr algn="ctr"/>
+              <a:endParaRPr lang="en-US"/>
+            </a:p>
+          </p:txBody>
+        </p:sp>
+        <p:sp>
+          <p:nvSpPr>
+            <p:cNvPr id="29" name="Rectangle 28">
+              <a:extLst>
+                <a:ext uri="{FF2B5EF4-FFF2-40B4-BE49-F238E27FC236}">
+                  <a16:creationId xmlns:a16="http://schemas.microsoft.com/office/drawing/2014/main" id="{72BA2E40-BE9B-4C54-9CDD-40EE804CCE64}"/>
+                </a:ext>
+                <a:ext uri="{C183D7F6-B498-43B3-948B-1728B52AA6E4}">
+                  <adec:decorative xmlns:adec="http://schemas.microsoft.com/office/drawing/2017/decorative" val="1"/>
+                </a:ext>
+              </a:extLst>
+            </p:cNvPr>
+            <p:cNvSpPr/>
+            <p:nvPr>
+              <p:extLst>
+                <p:ext uri="{386F3935-93C4-4BCD-93E2-E3B085C9AB24}">
+                  <p16:designElem xmlns:p16="http://schemas.microsoft.com/office/powerpoint/2015/main" val="1"/>
+                </p:ext>
+              </p:extLst>
+            </p:nvPr>
+          </p:nvSpPr>
+          <p:spPr>
+            <a:xfrm flipH="1" flipV="1">
+              <a:off x="6081624" y="1998844"/>
+              <a:ext cx="5372968" cy="781699"/>
+            </a:xfrm>
+            <a:prstGeom prst="rect">
+              <a:avLst/>
+            </a:prstGeom>
+            <a:grpFill/>
+            <a:ln>
+              <a:noFill/>
+            </a:ln>
+          </p:spPr>
+          <p:style>
+            <a:lnRef idx="2">
+              <a:schemeClr val="accent1">
+                <a:shade val="50000"/>
+              </a:schemeClr>
+            </a:lnRef>
+            <a:fillRef idx="1">
+              <a:schemeClr val="accent1"/>
+            </a:fillRef>
+            <a:effectRef idx="0">
+              <a:schemeClr val="accent1"/>
+            </a:effectRef>
+            <a:fontRef idx="minor">
+              <a:schemeClr val="lt1"/>
+            </a:fontRef>
+          </p:style>
+          <p:txBody>
+            <a:bodyPr rtlCol="0" anchor="ctr"/>
+            <a:lstStyle/>
+            <a:p>
+              <a:pPr algn="ctr"/>
+              <a:endParaRPr lang="en-US"/>
+            </a:p>
+          </p:txBody>
+        </p:sp>
+      </p:grpSp>
+      <p:sp>
+        <p:nvSpPr>
+          <p:cNvPr id="31" name="Rectangle 30">
+            <a:extLst>
+              <a:ext uri="{FF2B5EF4-FFF2-40B4-BE49-F238E27FC236}">
+                <a16:creationId xmlns:a16="http://schemas.microsoft.com/office/drawing/2014/main" id="{0DA909B4-15FF-46A6-8A7F-7AEF977FE9ED}"/>
+              </a:ext>
+              <a:ext uri="{C183D7F6-B498-43B3-948B-1728B52AA6E4}">
+                <adec:decorative xmlns:adec="http://schemas.microsoft.com/office/drawing/2017/decorative" val="1"/>
+              </a:ext>
+            </a:extLst>
+          </p:cNvPr>
+          <p:cNvSpPr>
+            <a:spLocks noGrp="1" noRot="1" noChangeAspect="1" noMove="1" noResize="1" noEditPoints="1" noAdjustHandles="1" noChangeArrowheads="1" noChangeShapeType="1" noTextEdit="1"/>
+          </p:cNvSpPr>
+          <p:nvPr>
+            <p:extLst>
+              <p:ext uri="{386F3935-93C4-4BCD-93E2-E3B085C9AB24}">
+                <p16:designElem xmlns:p16="http://schemas.microsoft.com/office/powerpoint/2015/main" val="1"/>
+              </p:ext>
+            </p:extLst>
+          </p:nvPr>
+        </p:nvSpPr>
+        <p:spPr>
+          <a:xfrm>
+            <a:off x="579528" y="517897"/>
+            <a:ext cx="11111729" cy="5857966"/>
+          </a:xfrm>
+          <a:prstGeom prst="rect">
+            <a:avLst/>
+          </a:prstGeom>
+          <a:solidFill>
+            <a:schemeClr val="bg1"/>
+          </a:solidFill>
+          <a:ln>
+            <a:noFill/>
+          </a:ln>
+          <a:effectLst>
+            <a:outerShdw blurRad="139700" dist="127000" dir="5400000" algn="t" rotWithShape="0">
+              <a:prstClr val="black">
+                <a:alpha val="15000"/>
+              </a:prstClr>
+            </a:outerShdw>
+          </a:effectLst>
+        </p:spPr>
+        <p:style>
+          <a:lnRef idx="2">
+            <a:schemeClr val="accent1">
+              <a:shade val="50000"/>
+            </a:schemeClr>
+          </a:lnRef>
+          <a:fillRef idx="1">
+            <a:schemeClr val="accent1"/>
+          </a:fillRef>
+          <a:effectRef idx="0">
+            <a:schemeClr val="accent1"/>
+          </a:effectRef>
+          <a:fontRef idx="minor">
+            <a:schemeClr val="lt1"/>
+          </a:fontRef>
+        </p:style>
+        <p:txBody>
+          <a:bodyPr rtlCol="0" anchor="ctr"/>
+          <a:lstStyle/>
+          <a:p>
+            <a:pPr algn="ctr"/>
+            <a:endParaRPr lang="en-US"/>
+          </a:p>
+        </p:txBody>
+      </p:sp>
       <p:sp>
         <p:nvSpPr>
           <p:cNvPr id="2" name="Titre 1">
@@ -5151,16 +4948,86 @@
             <p:ph type="title"/>
           </p:nvPr>
         </p:nvSpPr>
-        <p:spPr/>
-        <p:txBody>
-          <a:bodyPr/>
-          <a:lstStyle/>
-          <a:p>
-            <a:r>
-              <a:rPr lang="fr-FR" dirty="0"/>
+        <p:spPr>
+          <a:xfrm>
+            <a:off x="1057025" y="922644"/>
+            <a:ext cx="5040285" cy="1169585"/>
+          </a:xfrm>
+        </p:spPr>
+        <p:txBody>
+          <a:bodyPr anchor="b">
+            <a:normAutofit/>
+          </a:bodyPr>
+          <a:lstStyle/>
+          <a:p>
+            <a:r>
+              <a:rPr lang="fr-FR" sz="3700"/>
               <a:t>Étape 2 : Image et matériaux</a:t>
             </a:r>
-            <a:endParaRPr lang="es-AR" dirty="0"/>
+            <a:endParaRPr lang="es-AR" sz="3700"/>
+          </a:p>
+        </p:txBody>
+      </p:sp>
+      <p:sp>
+        <p:nvSpPr>
+          <p:cNvPr id="33" name="Rectangle 32">
+            <a:extLst>
+              <a:ext uri="{FF2B5EF4-FFF2-40B4-BE49-F238E27FC236}">
+                <a16:creationId xmlns:a16="http://schemas.microsoft.com/office/drawing/2014/main" id="{1382A32C-5B0C-4B1C-A074-76C6DBCC9F87}"/>
+              </a:ext>
+              <a:ext uri="{C183D7F6-B498-43B3-948B-1728B52AA6E4}">
+                <adec:decorative xmlns:adec="http://schemas.microsoft.com/office/drawing/2017/decorative" val="1"/>
+              </a:ext>
+            </a:extLst>
+          </p:cNvPr>
+          <p:cNvSpPr>
+            <a:spLocks noGrp="1" noRot="1" noChangeAspect="1" noMove="1" noResize="1" noEditPoints="1" noAdjustHandles="1" noChangeArrowheads="1" noChangeShapeType="1" noTextEdit="1"/>
+          </p:cNvSpPr>
+          <p:nvPr>
+            <p:extLst>
+              <p:ext uri="{386F3935-93C4-4BCD-93E2-E3B085C9AB24}">
+                <p16:designElem xmlns:p16="http://schemas.microsoft.com/office/powerpoint/2015/main" val="1"/>
+              </p:ext>
+            </p:extLst>
+          </p:nvPr>
+        </p:nvSpPr>
+        <p:spPr>
+          <a:xfrm flipH="1">
+            <a:off x="1055714" y="2263365"/>
+            <a:ext cx="4937760" cy="27432"/>
+          </a:xfrm>
+          <a:prstGeom prst="rect">
+            <a:avLst/>
+          </a:prstGeom>
+          <a:solidFill>
+            <a:schemeClr val="accent4"/>
+          </a:solidFill>
+          <a:ln>
+            <a:noFill/>
+          </a:ln>
+        </p:spPr>
+        <p:style>
+          <a:lnRef idx="2">
+            <a:schemeClr val="accent1">
+              <a:shade val="50000"/>
+            </a:schemeClr>
+          </a:lnRef>
+          <a:fillRef idx="1">
+            <a:schemeClr val="accent1"/>
+          </a:fillRef>
+          <a:effectRef idx="0">
+            <a:schemeClr val="accent1"/>
+          </a:effectRef>
+          <a:fontRef idx="minor">
+            <a:schemeClr val="lt1"/>
+          </a:fontRef>
+        </p:style>
+        <p:txBody>
+          <a:bodyPr rtlCol="0" anchor="ctr"/>
+          <a:lstStyle/>
+          <a:p>
+            <a:pPr algn="ctr"/>
+            <a:endParaRPr lang="en-US"/>
           </a:p>
         </p:txBody>
       </p:sp>
@@ -5180,73 +5047,120 @@
             <p:ph idx="1"/>
           </p:nvPr>
         </p:nvSpPr>
-        <p:spPr/>
-        <p:txBody>
-          <a:bodyPr/>
-          <a:lstStyle/>
-          <a:p>
-            <a:r>
-              <a:rPr lang="es-AR" dirty="0" err="1"/>
+        <p:spPr>
+          <a:xfrm>
+            <a:off x="1055715" y="2508105"/>
+            <a:ext cx="5040285" cy="3632493"/>
+          </a:xfrm>
+        </p:spPr>
+        <p:txBody>
+          <a:bodyPr anchor="ctr">
+            <a:normAutofit/>
+          </a:bodyPr>
+          <a:lstStyle/>
+          <a:p>
+            <a:r>
+              <a:rPr lang="es-AR" sz="2000"/>
               <a:t>Image</a:t>
             </a:r>
             <a:r>
-              <a:rPr lang="es-AR" dirty="0"/>
+              <a:rPr lang="es-AR" sz="2000" dirty="0"/>
               <a:t> du </a:t>
             </a:r>
             <a:r>
-              <a:rPr lang="es-AR" dirty="0" err="1"/>
+              <a:rPr lang="es-AR" sz="2000"/>
               <a:t>meuble</a:t>
             </a:r>
-            <a:endParaRPr lang="es-AR" dirty="0"/>
-          </a:p>
-          <a:p>
-            <a:pPr lvl="1"/>
-            <a:r>
-              <a:rPr lang="fr-FR" dirty="0"/>
-              <a:t>Permet au LLM de comprendre :</a:t>
-            </a:r>
-          </a:p>
-          <a:p>
-            <a:pPr lvl="1"/>
-            <a:r>
-              <a:rPr lang="fr-FR" dirty="0"/>
-              <a:t>le type d’objet</a:t>
-            </a:r>
-          </a:p>
-          <a:p>
-            <a:pPr lvl="1"/>
-            <a:r>
-              <a:rPr lang="fr-FR" dirty="0"/>
-              <a:t>le niveau de finition</a:t>
-            </a:r>
-          </a:p>
-          <a:p>
-            <a:pPr lvl="1"/>
-            <a:r>
-              <a:rPr lang="fr-FR" dirty="0"/>
-              <a:t>le contexte d’utilisation</a:t>
-            </a:r>
-          </a:p>
-          <a:p>
-            <a:r>
-              <a:rPr lang="es-AR" dirty="0" err="1"/>
+            <a:endParaRPr lang="es-AR" sz="2000" dirty="0"/>
+          </a:p>
+          <a:p>
+            <a:r>
+              <a:rPr lang="es-AR" sz="2000" dirty="0" err="1"/>
               <a:t>Matériaux</a:t>
             </a:r>
             <a:r>
-              <a:rPr lang="es-AR" dirty="0"/>
+              <a:rPr lang="es-AR" sz="2000" dirty="0"/>
               <a:t> </a:t>
             </a:r>
             <a:r>
-              <a:rPr lang="es-AR" dirty="0" err="1"/>
+              <a:rPr lang="es-AR" sz="2000"/>
               <a:t>utilisés</a:t>
             </a:r>
-            <a:endParaRPr lang="es-AR" dirty="0"/>
-          </a:p>
-          <a:p>
-            <a:endParaRPr lang="es-AR" dirty="0"/>
-          </a:p>
-        </p:txBody>
-      </p:sp>
+            <a:endParaRPr lang="es-AR" sz="2000" dirty="0"/>
+          </a:p>
+          <a:p>
+            <a:endParaRPr lang="es-AR" sz="2000" dirty="0"/>
+          </a:p>
+        </p:txBody>
+      </p:sp>
+      <p:pic>
+        <p:nvPicPr>
+          <p:cNvPr id="7" name="Image 6" descr="Une image contenant croquis, dessin, conception, illustration&#10;&#10;Le contenu généré par l’IA peut être incorrect.">
+            <a:extLst>
+              <a:ext uri="{FF2B5EF4-FFF2-40B4-BE49-F238E27FC236}">
+                <a16:creationId xmlns:a16="http://schemas.microsoft.com/office/drawing/2014/main" id="{584F66D5-C527-E88B-88E6-659C53639B2C}"/>
+              </a:ext>
+            </a:extLst>
+          </p:cNvPr>
+          <p:cNvPicPr>
+            <a:picLocks noChangeAspect="1"/>
+          </p:cNvPicPr>
+          <p:nvPr/>
+        </p:nvPicPr>
+        <p:blipFill>
+          <a:blip r:embed="rId2">
+            <a:extLst>
+              <a:ext uri="{28A0092B-C50C-407E-A947-70E740481C1C}">
+                <a14:useLocalDpi xmlns:a14="http://schemas.microsoft.com/office/drawing/2010/main" val="0"/>
+              </a:ext>
+            </a:extLst>
+          </a:blip>
+          <a:srcRect r="2" b="13519"/>
+          <a:stretch>
+            <a:fillRect/>
+          </a:stretch>
+        </p:blipFill>
+        <p:spPr>
+          <a:xfrm>
+            <a:off x="6946667" y="774285"/>
+            <a:ext cx="4389120" cy="2581173"/>
+          </a:xfrm>
+          <a:prstGeom prst="rect">
+            <a:avLst/>
+          </a:prstGeom>
+        </p:spPr>
+      </p:pic>
+      <p:pic>
+        <p:nvPicPr>
+          <p:cNvPr id="5" name="Image 4" descr="Une image contenant texte, capture d’écran, ligne, Police&#10;&#10;Le contenu généré par l’IA peut être incorrect.">
+            <a:extLst>
+              <a:ext uri="{FF2B5EF4-FFF2-40B4-BE49-F238E27FC236}">
+                <a16:creationId xmlns:a16="http://schemas.microsoft.com/office/drawing/2014/main" id="{3C81529A-0816-2472-EF7D-553410821491}"/>
+              </a:ext>
+            </a:extLst>
+          </p:cNvPr>
+          <p:cNvPicPr>
+            <a:picLocks noChangeAspect="1"/>
+          </p:cNvPicPr>
+          <p:nvPr/>
+        </p:nvPicPr>
+        <p:blipFill>
+          <a:blip r:embed="rId3"/>
+          <a:srcRect r="48987" b="1"/>
+          <a:stretch>
+            <a:fillRect/>
+          </a:stretch>
+        </p:blipFill>
+        <p:spPr>
+          <a:xfrm>
+            <a:off x="6946667" y="3575074"/>
+            <a:ext cx="4389120" cy="2581173"/>
+          </a:xfrm>
+          <a:prstGeom prst="rect">
+            <a:avLst/>
+          </a:prstGeom>
+        </p:spPr>
+      </p:pic>
     </p:spTree>
     <p:extLst>
       <p:ext uri="{BB962C8B-B14F-4D97-AF65-F5344CB8AC3E}">
@@ -5263,6 +5177,14 @@
 <file path=ppt/slides/slide5.xml><?xml version="1.0" encoding="utf-8"?>
 <p:sld xmlns:a="http://schemas.openxmlformats.org/drawingml/2006/main" xmlns:r="http://schemas.openxmlformats.org/officeDocument/2006/relationships" xmlns:p="http://schemas.openxmlformats.org/presentationml/2006/main">
   <p:cSld>
+    <p:bg>
+      <p:bgPr>
+        <a:solidFill>
+          <a:schemeClr val="bg1"/>
+        </a:solidFill>
+        <a:effectLst/>
+      </p:bgPr>
+    </p:bg>
     <p:spTree>
       <p:nvGrpSpPr>
         <p:cNvPr id="1" name=""/>
@@ -5277,6 +5199,66 @@
           <a:chExt cx="0" cy="0"/>
         </a:xfrm>
       </p:grpSpPr>
+      <p:sp useBgFill="1">
+        <p:nvSpPr>
+          <p:cNvPr id="16" name="Rectangle 15">
+            <a:extLst>
+              <a:ext uri="{FF2B5EF4-FFF2-40B4-BE49-F238E27FC236}">
+                <a16:creationId xmlns:a16="http://schemas.microsoft.com/office/drawing/2014/main" id="{DBF61EA3-B236-439E-9C0B-340980D56BEE}"/>
+              </a:ext>
+              <a:ext uri="{C183D7F6-B498-43B3-948B-1728B52AA6E4}">
+                <adec:decorative xmlns:adec="http://schemas.microsoft.com/office/drawing/2017/decorative" val="1"/>
+              </a:ext>
+            </a:extLst>
+          </p:cNvPr>
+          <p:cNvSpPr>
+            <a:spLocks noGrp="1" noRot="1" noChangeAspect="1" noMove="1" noResize="1" noEditPoints="1" noAdjustHandles="1" noChangeArrowheads="1" noChangeShapeType="1" noTextEdit="1"/>
+          </p:cNvSpPr>
+          <p:nvPr>
+            <p:extLst>
+              <p:ext uri="{386F3935-93C4-4BCD-93E2-E3B085C9AB24}">
+                <p16:designElem xmlns:p16="http://schemas.microsoft.com/office/powerpoint/2015/main" val="1"/>
+              </p:ext>
+            </p:extLst>
+          </p:nvPr>
+        </p:nvSpPr>
+        <p:spPr>
+          <a:xfrm>
+            <a:off x="0" y="0"/>
+            <a:ext cx="12191999" cy="6857365"/>
+          </a:xfrm>
+          <a:prstGeom prst="rect">
+            <a:avLst/>
+          </a:prstGeom>
+          <a:ln>
+            <a:noFill/>
+          </a:ln>
+        </p:spPr>
+        <p:style>
+          <a:lnRef idx="2">
+            <a:schemeClr val="accent1">
+              <a:shade val="50000"/>
+            </a:schemeClr>
+          </a:lnRef>
+          <a:fillRef idx="1">
+            <a:schemeClr val="accent1"/>
+          </a:fillRef>
+          <a:effectRef idx="0">
+            <a:schemeClr val="accent1"/>
+          </a:effectRef>
+          <a:fontRef idx="minor">
+            <a:schemeClr val="lt1"/>
+          </a:fontRef>
+        </p:style>
+        <p:txBody>
+          <a:bodyPr rtlCol="0" anchor="ctr"/>
+          <a:lstStyle/>
+          <a:p>
+            <a:pPr algn="ctr"/>
+            <a:endParaRPr lang="en-US"/>
+          </a:p>
+        </p:txBody>
+      </p:sp>
       <p:sp>
         <p:nvSpPr>
           <p:cNvPr id="2" name="Titre 1">
@@ -5293,123 +5275,366 @@
             <p:ph type="title"/>
           </p:nvPr>
         </p:nvSpPr>
-        <p:spPr/>
-        <p:txBody>
-          <a:bodyPr/>
-          <a:lstStyle/>
-          <a:p>
-            <a:r>
-              <a:rPr lang="fr-FR" dirty="0"/>
-              <a:t>Étape 3 : Appel au LLM (Gemini)</a:t>
-            </a:r>
-            <a:endParaRPr lang="es-AR" dirty="0"/>
-          </a:p>
-        </p:txBody>
-      </p:sp>
-      <p:sp>
-        <p:nvSpPr>
-          <p:cNvPr id="3" name="Espace réservé du contenu 2">
-            <a:extLst>
-              <a:ext uri="{FF2B5EF4-FFF2-40B4-BE49-F238E27FC236}">
-                <a16:creationId xmlns:a16="http://schemas.microsoft.com/office/drawing/2014/main" id="{BE46C37E-D4FF-D8EF-AD88-8A2E9AD3688E}"/>
-              </a:ext>
-            </a:extLst>
-          </p:cNvPr>
-          <p:cNvSpPr>
-            <a:spLocks noGrp="1"/>
-          </p:cNvSpPr>
-          <p:nvPr>
-            <p:ph idx="1"/>
-          </p:nvPr>
-        </p:nvSpPr>
-        <p:spPr/>
-        <p:txBody>
-          <a:bodyPr>
+        <p:spPr>
+          <a:xfrm>
+            <a:off x="808638" y="386930"/>
+            <a:ext cx="9236700" cy="1188950"/>
+          </a:xfrm>
+        </p:spPr>
+        <p:txBody>
+          <a:bodyPr anchor="b">
             <a:normAutofit/>
           </a:bodyPr>
           <a:lstStyle/>
           <a:p>
             <a:r>
-              <a:rPr lang="fr-FR" b="1" dirty="0"/>
+              <a:rPr lang="fr-FR" sz="5400"/>
+              <a:t>Étape 3 : Appel au LLM (Gemini)</a:t>
+            </a:r>
+            <a:endParaRPr lang="es-AR" sz="5400"/>
+          </a:p>
+        </p:txBody>
+      </p:sp>
+      <p:grpSp>
+        <p:nvGrpSpPr>
+          <p:cNvPr id="17" name="Group 9">
+            <a:extLst>
+              <a:ext uri="{FF2B5EF4-FFF2-40B4-BE49-F238E27FC236}">
+                <a16:creationId xmlns:a16="http://schemas.microsoft.com/office/drawing/2014/main" id="{28FAF094-D087-493F-8DF9-A486C2D6BBAA}"/>
+              </a:ext>
+              <a:ext uri="{C183D7F6-B498-43B3-948B-1728B52AA6E4}">
+                <adec:decorative xmlns:adec="http://schemas.microsoft.com/office/drawing/2017/decorative" val="1"/>
+              </a:ext>
+            </a:extLst>
+          </p:cNvPr>
+          <p:cNvGrpSpPr>
+            <a:grpSpLocks noGrp="1" noUngrp="1" noRot="1" noChangeAspect="1" noMove="1" noResize="1"/>
+          </p:cNvGrpSpPr>
+          <p:nvPr>
+            <p:extLst>
+              <p:ext uri="{386F3935-93C4-4BCD-93E2-E3B085C9AB24}">
+                <p16:designElem xmlns:p16="http://schemas.microsoft.com/office/powerpoint/2015/main" val="1"/>
+              </p:ext>
+            </p:extLst>
+          </p:nvPr>
+        </p:nvGrpSpPr>
+        <p:grpSpPr>
+          <a:xfrm>
+            <a:off x="-2" y="1998368"/>
+            <a:ext cx="11695083" cy="782176"/>
+            <a:chOff x="-2" y="1998368"/>
+            <a:chExt cx="11695083" cy="782176"/>
+          </a:xfrm>
+        </p:grpSpPr>
+        <p:sp>
+          <p:nvSpPr>
+            <p:cNvPr id="18" name="Rectangle 17">
+              <a:extLst>
+                <a:ext uri="{FF2B5EF4-FFF2-40B4-BE49-F238E27FC236}">
+                  <a16:creationId xmlns:a16="http://schemas.microsoft.com/office/drawing/2014/main" id="{8D7C88D8-5509-4514-925A-9CE148E5CBD6}"/>
+                </a:ext>
+                <a:ext uri="{C183D7F6-B498-43B3-948B-1728B52AA6E4}">
+                  <adec:decorative xmlns:adec="http://schemas.microsoft.com/office/drawing/2017/decorative" val="1"/>
+                </a:ext>
+              </a:extLst>
+            </p:cNvPr>
+            <p:cNvSpPr/>
+            <p:nvPr>
+              <p:extLst>
+                <p:ext uri="{386F3935-93C4-4BCD-93E2-E3B085C9AB24}">
+                  <p16:designElem xmlns:p16="http://schemas.microsoft.com/office/powerpoint/2015/main" val="1"/>
+                </p:ext>
+              </p:extLst>
+            </p:nvPr>
+          </p:nvSpPr>
+          <p:spPr>
+            <a:xfrm rot="5400000">
+              <a:off x="11228040" y="2313027"/>
+              <a:ext cx="781700" cy="152382"/>
+            </a:xfrm>
+            <a:prstGeom prst="rect">
+              <a:avLst/>
+            </a:prstGeom>
+            <a:solidFill>
+              <a:schemeClr val="accent4"/>
+            </a:solidFill>
+            <a:ln>
+              <a:noFill/>
+            </a:ln>
+          </p:spPr>
+          <p:style>
+            <a:lnRef idx="2">
+              <a:schemeClr val="accent1">
+                <a:shade val="50000"/>
+              </a:schemeClr>
+            </a:lnRef>
+            <a:fillRef idx="1">
+              <a:schemeClr val="accent1"/>
+            </a:fillRef>
+            <a:effectRef idx="0">
+              <a:schemeClr val="accent1"/>
+            </a:effectRef>
+            <a:fontRef idx="minor">
+              <a:schemeClr val="lt1"/>
+            </a:fontRef>
+          </p:style>
+          <p:txBody>
+            <a:bodyPr rtlCol="0" anchor="ctr"/>
+            <a:lstStyle/>
+            <a:p>
+              <a:pPr algn="ctr"/>
+              <a:endParaRPr lang="en-US"/>
+            </a:p>
+          </p:txBody>
+        </p:sp>
+        <p:sp>
+          <p:nvSpPr>
+            <p:cNvPr id="12" name="Rectangle 11">
+              <a:extLst>
+                <a:ext uri="{FF2B5EF4-FFF2-40B4-BE49-F238E27FC236}">
+                  <a16:creationId xmlns:a16="http://schemas.microsoft.com/office/drawing/2014/main" id="{7275593D-F75E-4426-AE3E-2CDEFD228D25}"/>
+                </a:ext>
+                <a:ext uri="{C183D7F6-B498-43B3-948B-1728B52AA6E4}">
+                  <adec:decorative xmlns:adec="http://schemas.microsoft.com/office/drawing/2017/decorative" val="1"/>
+                </a:ext>
+              </a:extLst>
+            </p:cNvPr>
+            <p:cNvSpPr/>
+            <p:nvPr>
+              <p:extLst>
+                <p:ext uri="{386F3935-93C4-4BCD-93E2-E3B085C9AB24}">
+                  <p16:designElem xmlns:p16="http://schemas.microsoft.com/office/powerpoint/2015/main" val="1"/>
+                </p:ext>
+              </p:extLst>
+            </p:nvPr>
+          </p:nvSpPr>
+          <p:spPr>
+            <a:xfrm flipH="1" flipV="1">
+              <a:off x="-2" y="1998845"/>
+              <a:ext cx="11454595" cy="781699"/>
+            </a:xfrm>
+            <a:prstGeom prst="rect">
+              <a:avLst/>
+            </a:prstGeom>
+            <a:solidFill>
+              <a:schemeClr val="accent4"/>
+            </a:solidFill>
+            <a:ln>
+              <a:noFill/>
+            </a:ln>
+          </p:spPr>
+          <p:style>
+            <a:lnRef idx="2">
+              <a:schemeClr val="accent1">
+                <a:shade val="50000"/>
+              </a:schemeClr>
+            </a:lnRef>
+            <a:fillRef idx="1">
+              <a:schemeClr val="accent1"/>
+            </a:fillRef>
+            <a:effectRef idx="0">
+              <a:schemeClr val="accent1"/>
+            </a:effectRef>
+            <a:fontRef idx="minor">
+              <a:schemeClr val="lt1"/>
+            </a:fontRef>
+          </p:style>
+          <p:txBody>
+            <a:bodyPr rtlCol="0" anchor="ctr"/>
+            <a:lstStyle/>
+            <a:p>
+              <a:pPr algn="ctr"/>
+              <a:endParaRPr lang="en-US"/>
+            </a:p>
+          </p:txBody>
+        </p:sp>
+      </p:grpSp>
+      <p:sp>
+        <p:nvSpPr>
+          <p:cNvPr id="19" name="Rectangle 18">
+            <a:extLst>
+              <a:ext uri="{FF2B5EF4-FFF2-40B4-BE49-F238E27FC236}">
+                <a16:creationId xmlns:a16="http://schemas.microsoft.com/office/drawing/2014/main" id="{E659831F-0D9A-4C63-9EBB-8435B85A440F}"/>
+              </a:ext>
+              <a:ext uri="{C183D7F6-B498-43B3-948B-1728B52AA6E4}">
+                <adec:decorative xmlns:adec="http://schemas.microsoft.com/office/drawing/2017/decorative" val="1"/>
+              </a:ext>
+            </a:extLst>
+          </p:cNvPr>
+          <p:cNvSpPr>
+            <a:spLocks noGrp="1" noRot="1" noChangeAspect="1" noMove="1" noResize="1" noEditPoints="1" noAdjustHandles="1" noChangeArrowheads="1" noChangeShapeType="1" noTextEdit="1"/>
+          </p:cNvSpPr>
+          <p:nvPr>
+            <p:extLst>
+              <p:ext uri="{386F3935-93C4-4BCD-93E2-E3B085C9AB24}">
+                <p16:designElem xmlns:p16="http://schemas.microsoft.com/office/powerpoint/2015/main" val="1"/>
+              </p:ext>
+            </p:extLst>
+          </p:nvPr>
+        </p:nvSpPr>
+        <p:spPr>
+          <a:xfrm>
+            <a:off x="0" y="2203079"/>
+            <a:ext cx="11383362" cy="4147845"/>
+          </a:xfrm>
+          <a:prstGeom prst="rect">
+            <a:avLst/>
+          </a:prstGeom>
+          <a:solidFill>
+            <a:schemeClr val="bg1"/>
+          </a:solidFill>
+          <a:ln>
+            <a:noFill/>
+          </a:ln>
+          <a:effectLst>
+            <a:outerShdw blurRad="139700" dist="127000" dir="5400000" algn="t" rotWithShape="0">
+              <a:prstClr val="black">
+                <a:alpha val="15000"/>
+              </a:prstClr>
+            </a:outerShdw>
+          </a:effectLst>
+        </p:spPr>
+        <p:style>
+          <a:lnRef idx="2">
+            <a:schemeClr val="accent1">
+              <a:shade val="50000"/>
+            </a:schemeClr>
+          </a:lnRef>
+          <a:fillRef idx="1">
+            <a:schemeClr val="accent1"/>
+          </a:fillRef>
+          <a:effectRef idx="0">
+            <a:schemeClr val="accent1"/>
+          </a:effectRef>
+          <a:fontRef idx="minor">
+            <a:schemeClr val="lt1"/>
+          </a:fontRef>
+        </p:style>
+        <p:txBody>
+          <a:bodyPr rtlCol="0" anchor="ctr"/>
+          <a:lstStyle/>
+          <a:p>
+            <a:pPr algn="ctr"/>
+            <a:endParaRPr lang="en-US"/>
+          </a:p>
+        </p:txBody>
+      </p:sp>
+      <p:sp>
+        <p:nvSpPr>
+          <p:cNvPr id="3" name="Espace réservé du contenu 2">
+            <a:extLst>
+              <a:ext uri="{FF2B5EF4-FFF2-40B4-BE49-F238E27FC236}">
+                <a16:creationId xmlns:a16="http://schemas.microsoft.com/office/drawing/2014/main" id="{BE46C37E-D4FF-D8EF-AD88-8A2E9AD3688E}"/>
+              </a:ext>
+            </a:extLst>
+          </p:cNvPr>
+          <p:cNvSpPr>
+            <a:spLocks noGrp="1"/>
+          </p:cNvSpPr>
+          <p:nvPr>
+            <p:ph idx="1"/>
+          </p:nvPr>
+        </p:nvSpPr>
+        <p:spPr>
+          <a:xfrm>
+            <a:off x="793660" y="2599509"/>
+            <a:ext cx="10143668" cy="3435531"/>
+          </a:xfrm>
+        </p:spPr>
+        <p:txBody>
+          <a:bodyPr anchor="ctr">
+            <a:normAutofit/>
+          </a:bodyPr>
+          <a:lstStyle/>
+          <a:p>
+            <a:r>
+              <a:rPr lang="fr-FR" sz="2200" b="1" dirty="0"/>
               <a:t>Entrées fournies à Gemini</a:t>
             </a:r>
-            <a:endParaRPr lang="fr-FR" dirty="0"/>
+            <a:endParaRPr lang="fr-FR" sz="2200" dirty="0"/>
           </a:p>
           <a:p>
             <a:pPr lvl="1"/>
             <a:r>
-              <a:rPr lang="fr-FR" dirty="0"/>
+              <a:rPr lang="fr-FR" sz="2200" dirty="0"/>
               <a:t>Fichier </a:t>
             </a:r>
             <a:r>
-              <a:rPr lang="fr-FR" b="1" dirty="0"/>
+              <a:rPr lang="fr-FR" sz="2200" b="1" dirty="0"/>
               <a:t>STL</a:t>
             </a:r>
             <a:r>
-              <a:rPr lang="fr-FR" dirty="0"/>
+              <a:rPr lang="fr-FR" sz="2200" dirty="0"/>
               <a:t> de la pièce</a:t>
             </a:r>
           </a:p>
           <a:p>
             <a:pPr lvl="1"/>
             <a:r>
-              <a:rPr lang="fr-FR" b="1" dirty="0"/>
+              <a:rPr lang="fr-FR" sz="2200" b="1" dirty="0"/>
               <a:t>Image</a:t>
             </a:r>
             <a:r>
-              <a:rPr lang="fr-FR" dirty="0"/>
+              <a:rPr lang="fr-FR" sz="2200" dirty="0"/>
               <a:t> du meuble</a:t>
             </a:r>
           </a:p>
           <a:p>
             <a:pPr lvl="1"/>
             <a:r>
-              <a:rPr lang="fr-FR" b="1" dirty="0"/>
+              <a:rPr lang="fr-FR" sz="2200" b="1" dirty="0"/>
               <a:t>Liste des matériaux</a:t>
             </a:r>
             <a:r>
-              <a:rPr lang="fr-FR" dirty="0"/>
+              <a:rPr lang="fr-FR" sz="2200" dirty="0"/>
               <a:t> </a:t>
             </a:r>
           </a:p>
           <a:p>
-            <a:r>
-              <a:rPr lang="fr-FR" b="1" dirty="0"/>
+            <a:pPr lvl="1"/>
+            <a:r>
+              <a:rPr lang="fr-FR" sz="2200" dirty="0"/>
+              <a:t>Prompt pour cadrer la demande </a:t>
+            </a:r>
+          </a:p>
+          <a:p>
+            <a:r>
+              <a:rPr lang="fr-FR" sz="2200" b="1"/>
               <a:t>Rôle du LLM</a:t>
             </a:r>
-            <a:endParaRPr lang="fr-FR" dirty="0"/>
+            <a:endParaRPr lang="fr-FR" sz="2200"/>
           </a:p>
           <a:p>
             <a:pPr lvl="1"/>
             <a:r>
-              <a:rPr lang="fr-FR" dirty="0"/>
+              <a:rPr lang="fr-FR" sz="2200" dirty="0"/>
               <a:t>Interpréter la géométrie, l’apparence et les matériaux</a:t>
             </a:r>
           </a:p>
           <a:p>
             <a:pPr lvl="1"/>
             <a:r>
-              <a:rPr lang="fr-FR" dirty="0"/>
+              <a:rPr lang="fr-FR" sz="2200" dirty="0"/>
               <a:t>S’inspirer de références de prix dans la même gamme</a:t>
             </a:r>
           </a:p>
           <a:p>
             <a:pPr lvl="1"/>
             <a:r>
-              <a:rPr lang="fr-FR" dirty="0"/>
+              <a:rPr lang="fr-FR" sz="2200" dirty="0"/>
               <a:t>Fournir </a:t>
             </a:r>
             <a:r>
-              <a:rPr lang="fr-FR" b="1" dirty="0"/>
+              <a:rPr lang="fr-FR" sz="2200" b="1" dirty="0"/>
               <a:t>plusieurs estimations de prix</a:t>
             </a:r>
             <a:r>
-              <a:rPr lang="fr-FR" dirty="0"/>
+              <a:rPr lang="fr-FR" sz="2200" dirty="0"/>
               <a:t> pour la pièce ou le meuble</a:t>
             </a:r>
           </a:p>
           <a:p>
-            <a:endParaRPr lang="es-AR" dirty="0"/>
+            <a:endParaRPr lang="es-AR" sz="2200" dirty="0"/>
           </a:p>
         </p:txBody>
       </p:sp>

--- a/Doc Slide/Pluo/Slide_Pluo.pptx
+++ b/Doc Slide/Pluo/Slide_Pluo.pptx
@@ -11,6 +11,7 @@
     <p:sldId id="260" r:id="rId5"/>
     <p:sldId id="261" r:id="rId6"/>
     <p:sldId id="262" r:id="rId7"/>
+    <p:sldId id="263" r:id="rId8"/>
   </p:sldIdLst>
   <p:sldSz cx="12192000" cy="6858000"/>
   <p:notesSz cx="6858000" cy="9144000"/>
@@ -266,7 +267,7 @@
           <a:p>
             <a:fld id="{AFF98120-A03B-421F-8E42-0D275B84E880}" type="datetimeFigureOut">
               <a:rPr lang="es-AR" smtClean="0"/>
-              <a:t>10/12/2025</a:t>
+              <a:t>11/12/2025</a:t>
             </a:fld>
             <a:endParaRPr lang="es-AR"/>
           </a:p>
@@ -466,7 +467,7 @@
           <a:p>
             <a:fld id="{AFF98120-A03B-421F-8E42-0D275B84E880}" type="datetimeFigureOut">
               <a:rPr lang="es-AR" smtClean="0"/>
-              <a:t>10/12/2025</a:t>
+              <a:t>11/12/2025</a:t>
             </a:fld>
             <a:endParaRPr lang="es-AR"/>
           </a:p>
@@ -676,7 +677,7 @@
           <a:p>
             <a:fld id="{AFF98120-A03B-421F-8E42-0D275B84E880}" type="datetimeFigureOut">
               <a:rPr lang="es-AR" smtClean="0"/>
-              <a:t>10/12/2025</a:t>
+              <a:t>11/12/2025</a:t>
             </a:fld>
             <a:endParaRPr lang="es-AR"/>
           </a:p>
@@ -876,7 +877,7 @@
           <a:p>
             <a:fld id="{AFF98120-A03B-421F-8E42-0D275B84E880}" type="datetimeFigureOut">
               <a:rPr lang="es-AR" smtClean="0"/>
-              <a:t>10/12/2025</a:t>
+              <a:t>11/12/2025</a:t>
             </a:fld>
             <a:endParaRPr lang="es-AR"/>
           </a:p>
@@ -1152,7 +1153,7 @@
           <a:p>
             <a:fld id="{AFF98120-A03B-421F-8E42-0D275B84E880}" type="datetimeFigureOut">
               <a:rPr lang="es-AR" smtClean="0"/>
-              <a:t>10/12/2025</a:t>
+              <a:t>11/12/2025</a:t>
             </a:fld>
             <a:endParaRPr lang="es-AR"/>
           </a:p>
@@ -1420,7 +1421,7 @@
           <a:p>
             <a:fld id="{AFF98120-A03B-421F-8E42-0D275B84E880}" type="datetimeFigureOut">
               <a:rPr lang="es-AR" smtClean="0"/>
-              <a:t>10/12/2025</a:t>
+              <a:t>11/12/2025</a:t>
             </a:fld>
             <a:endParaRPr lang="es-AR"/>
           </a:p>
@@ -1835,7 +1836,7 @@
           <a:p>
             <a:fld id="{AFF98120-A03B-421F-8E42-0D275B84E880}" type="datetimeFigureOut">
               <a:rPr lang="es-AR" smtClean="0"/>
-              <a:t>10/12/2025</a:t>
+              <a:t>11/12/2025</a:t>
             </a:fld>
             <a:endParaRPr lang="es-AR"/>
           </a:p>
@@ -1977,7 +1978,7 @@
           <a:p>
             <a:fld id="{AFF98120-A03B-421F-8E42-0D275B84E880}" type="datetimeFigureOut">
               <a:rPr lang="es-AR" smtClean="0"/>
-              <a:t>10/12/2025</a:t>
+              <a:t>11/12/2025</a:t>
             </a:fld>
             <a:endParaRPr lang="es-AR"/>
           </a:p>
@@ -2090,7 +2091,7 @@
           <a:p>
             <a:fld id="{AFF98120-A03B-421F-8E42-0D275B84E880}" type="datetimeFigureOut">
               <a:rPr lang="es-AR" smtClean="0"/>
-              <a:t>10/12/2025</a:t>
+              <a:t>11/12/2025</a:t>
             </a:fld>
             <a:endParaRPr lang="es-AR"/>
           </a:p>
@@ -2403,7 +2404,7 @@
           <a:p>
             <a:fld id="{AFF98120-A03B-421F-8E42-0D275B84E880}" type="datetimeFigureOut">
               <a:rPr lang="es-AR" smtClean="0"/>
-              <a:t>10/12/2025</a:t>
+              <a:t>11/12/2025</a:t>
             </a:fld>
             <a:endParaRPr lang="es-AR"/>
           </a:p>
@@ -2692,7 +2693,7 @@
           <a:p>
             <a:fld id="{AFF98120-A03B-421F-8E42-0D275B84E880}" type="datetimeFigureOut">
               <a:rPr lang="es-AR" smtClean="0"/>
-              <a:t>10/12/2025</a:t>
+              <a:t>11/12/2025</a:t>
             </a:fld>
             <a:endParaRPr lang="es-AR"/>
           </a:p>
@@ -2935,7 +2936,7 @@
           <a:p>
             <a:fld id="{AFF98120-A03B-421F-8E42-0D275B84E880}" type="datetimeFigureOut">
               <a:rPr lang="es-AR" smtClean="0"/>
-              <a:t>10/12/2025</a:t>
+              <a:t>11/12/2025</a:t>
             </a:fld>
             <a:endParaRPr lang="es-AR"/>
           </a:p>
@@ -4136,7 +4137,7 @@
         </p:nvSpPr>
         <p:spPr>
           <a:xfrm>
-            <a:off x="7321492" y="5707100"/>
+            <a:off x="9953248" y="5852049"/>
             <a:ext cx="977153" cy="304800"/>
           </a:xfrm>
           <a:prstGeom prst="rect">
@@ -4303,10 +4304,10 @@
           <a:lstStyle/>
           <a:p>
             <a:r>
-              <a:rPr lang="fr-FR" b="1"/>
-              <a:t>Étape 1 : Préparation dans Vectorworks</a:t>
-            </a:r>
-            <a:endParaRPr lang="es-AR"/>
+              <a:rPr lang="fr-FR" b="1" dirty="0"/>
+              <a:t>Étape 1 : Export du fichier STL</a:t>
+            </a:r>
+            <a:endParaRPr lang="es-AR" dirty="0"/>
           </a:p>
         </p:txBody>
       </p:sp>
@@ -4479,13 +4480,8 @@
           <a:p>
             <a:r>
               <a:rPr lang="fr-FR" sz="2000" dirty="0"/>
-              <a:t>Export de la pièce au format </a:t>
-            </a:r>
-            <a:r>
-              <a:rPr lang="fr-FR" sz="2000" b="1" dirty="0"/>
-              <a:t>STL</a:t>
-            </a:r>
-            <a:endParaRPr lang="fr-FR" sz="2000" dirty="0"/>
+              <a:t>Export de la pièce au format STL</a:t>
+            </a:r>
           </a:p>
           <a:p>
             <a:r>
@@ -4504,10 +4500,8 @@
             <a:pPr lvl="1"/>
             <a:r>
               <a:rPr lang="fr-FR" sz="2000" dirty="0"/>
-              <a:t>le volume de la pièce (utile pour estimer matière, temps machine, etc.)</a:t>
-            </a:r>
-          </a:p>
-          <a:p>
+              <a:t>le volume de la pièce</a:t>
+            </a:r>
             <a:endParaRPr lang="es-AR" sz="2000" dirty="0"/>
           </a:p>
         </p:txBody>
@@ -4961,10 +4955,10 @@
           <a:lstStyle/>
           <a:p>
             <a:r>
-              <a:rPr lang="fr-FR" sz="3700"/>
+              <a:rPr lang="fr-FR" sz="3700" dirty="0"/>
               <a:t>Étape 2 : Image et matériaux</a:t>
             </a:r>
-            <a:endParaRPr lang="es-AR" sz="3700"/>
+            <a:endParaRPr lang="es-AR" sz="3700" dirty="0"/>
           </a:p>
         </p:txBody>
       </p:sp>
@@ -5060,7 +5054,7 @@
           <a:lstStyle/>
           <a:p>
             <a:r>
-              <a:rPr lang="es-AR" sz="2000"/>
+              <a:rPr lang="es-AR" sz="2000" dirty="0" err="1"/>
               <a:t>Image</a:t>
             </a:r>
             <a:r>
@@ -5068,7 +5062,7 @@
               <a:t> du </a:t>
             </a:r>
             <a:r>
-              <a:rPr lang="es-AR" sz="2000"/>
+              <a:rPr lang="es-AR" sz="2000" dirty="0" err="1"/>
               <a:t>meuble</a:t>
             </a:r>
             <a:endParaRPr lang="es-AR" sz="2000" dirty="0"/>
@@ -5083,7 +5077,7 @@
               <a:t> </a:t>
             </a:r>
             <a:r>
-              <a:rPr lang="es-AR" sz="2000"/>
+              <a:rPr lang="es-AR" sz="2000" dirty="0" err="1"/>
               <a:t>utilisés</a:t>
             </a:r>
             <a:endParaRPr lang="es-AR" sz="2000" dirty="0"/>
@@ -5201,10 +5195,10 @@
       </p:grpSpPr>
       <p:sp useBgFill="1">
         <p:nvSpPr>
-          <p:cNvPr id="16" name="Rectangle 15">
-            <a:extLst>
-              <a:ext uri="{FF2B5EF4-FFF2-40B4-BE49-F238E27FC236}">
-                <a16:creationId xmlns:a16="http://schemas.microsoft.com/office/drawing/2014/main" id="{DBF61EA3-B236-439E-9C0B-340980D56BEE}"/>
+          <p:cNvPr id="24" name="Rectangle 23">
+            <a:extLst>
+              <a:ext uri="{FF2B5EF4-FFF2-40B4-BE49-F238E27FC236}">
+                <a16:creationId xmlns:a16="http://schemas.microsoft.com/office/drawing/2014/main" id="{058A14AF-9FB5-4CC7-BA35-E8E85D3EDF0E}"/>
               </a:ext>
               <a:ext uri="{C183D7F6-B498-43B3-948B-1728B52AA6E4}">
                 <adec:decorative xmlns:adec="http://schemas.microsoft.com/office/drawing/2017/decorative" val="1"/>
@@ -5277,8 +5271,8 @@
         </p:nvSpPr>
         <p:spPr>
           <a:xfrm>
-            <a:off x="808638" y="386930"/>
-            <a:ext cx="9236700" cy="1188950"/>
+            <a:off x="793662" y="386930"/>
+            <a:ext cx="10066122" cy="1298448"/>
           </a:xfrm>
         </p:spPr>
         <p:txBody>
@@ -5288,16 +5282,446 @@
           <a:lstStyle/>
           <a:p>
             <a:r>
-              <a:rPr lang="fr-FR" sz="5400"/>
-              <a:t>Étape 3 : Appel au LLM (Gemini)</a:t>
-            </a:r>
-            <a:endParaRPr lang="es-AR" sz="5400"/>
+              <a:rPr lang="fr-FR" sz="4800"/>
+              <a:t>Étape 3 : Estimation par le LLM Gemini</a:t>
+            </a:r>
+            <a:endParaRPr lang="es-AR" sz="4800"/>
+          </a:p>
+        </p:txBody>
+      </p:sp>
+      <p:sp>
+        <p:nvSpPr>
+          <p:cNvPr id="26" name="Rectangle 25">
+            <a:extLst>
+              <a:ext uri="{FF2B5EF4-FFF2-40B4-BE49-F238E27FC236}">
+                <a16:creationId xmlns:a16="http://schemas.microsoft.com/office/drawing/2014/main" id="{3A9A4357-BD1D-4622-A4FE-766E6AB8DE84}"/>
+              </a:ext>
+              <a:ext uri="{C183D7F6-B498-43B3-948B-1728B52AA6E4}">
+                <adec:decorative xmlns:adec="http://schemas.microsoft.com/office/drawing/2017/decorative" val="1"/>
+              </a:ext>
+            </a:extLst>
+          </p:cNvPr>
+          <p:cNvSpPr>
+            <a:spLocks noGrp="1" noRot="1" noChangeAspect="1" noMove="1" noResize="1" noEditPoints="1" noAdjustHandles="1" noChangeArrowheads="1" noChangeShapeType="1" noTextEdit="1"/>
+          </p:cNvSpPr>
+          <p:nvPr>
+            <p:extLst>
+              <p:ext uri="{386F3935-93C4-4BCD-93E2-E3B085C9AB24}">
+                <p16:designElem xmlns:p16="http://schemas.microsoft.com/office/powerpoint/2015/main" val="1"/>
+              </p:ext>
+            </p:extLst>
+          </p:nvPr>
+        </p:nvSpPr>
+        <p:spPr>
+          <a:xfrm flipH="1" flipV="1">
+            <a:off x="-2" y="1998845"/>
+            <a:ext cx="11454595" cy="781699"/>
+          </a:xfrm>
+          <a:prstGeom prst="rect">
+            <a:avLst/>
+          </a:prstGeom>
+          <a:solidFill>
+            <a:schemeClr val="accent4"/>
+          </a:solidFill>
+          <a:ln>
+            <a:noFill/>
+          </a:ln>
+        </p:spPr>
+        <p:style>
+          <a:lnRef idx="2">
+            <a:schemeClr val="accent1">
+              <a:shade val="50000"/>
+            </a:schemeClr>
+          </a:lnRef>
+          <a:fillRef idx="1">
+            <a:schemeClr val="accent1"/>
+          </a:fillRef>
+          <a:effectRef idx="0">
+            <a:schemeClr val="accent1"/>
+          </a:effectRef>
+          <a:fontRef idx="minor">
+            <a:schemeClr val="lt1"/>
+          </a:fontRef>
+        </p:style>
+        <p:txBody>
+          <a:bodyPr rtlCol="0" anchor="ctr"/>
+          <a:lstStyle/>
+          <a:p>
+            <a:pPr algn="ctr"/>
+            <a:endParaRPr lang="en-US"/>
+          </a:p>
+        </p:txBody>
+      </p:sp>
+      <p:sp>
+        <p:nvSpPr>
+          <p:cNvPr id="28" name="Rectangle 27">
+            <a:extLst>
+              <a:ext uri="{FF2B5EF4-FFF2-40B4-BE49-F238E27FC236}">
+                <a16:creationId xmlns:a16="http://schemas.microsoft.com/office/drawing/2014/main" id="{E659831F-0D9A-4C63-9EBB-8435B85A440F}"/>
+              </a:ext>
+              <a:ext uri="{C183D7F6-B498-43B3-948B-1728B52AA6E4}">
+                <adec:decorative xmlns:adec="http://schemas.microsoft.com/office/drawing/2017/decorative" val="1"/>
+              </a:ext>
+            </a:extLst>
+          </p:cNvPr>
+          <p:cNvSpPr>
+            <a:spLocks noGrp="1" noRot="1" noChangeAspect="1" noMove="1" noResize="1" noEditPoints="1" noAdjustHandles="1" noChangeArrowheads="1" noChangeShapeType="1" noTextEdit="1"/>
+          </p:cNvSpPr>
+          <p:nvPr>
+            <p:extLst>
+              <p:ext uri="{386F3935-93C4-4BCD-93E2-E3B085C9AB24}">
+                <p16:designElem xmlns:p16="http://schemas.microsoft.com/office/powerpoint/2015/main" val="1"/>
+              </p:ext>
+            </p:extLst>
+          </p:nvPr>
+        </p:nvSpPr>
+        <p:spPr>
+          <a:xfrm>
+            <a:off x="0" y="2203079"/>
+            <a:ext cx="11383362" cy="4267991"/>
+          </a:xfrm>
+          <a:prstGeom prst="rect">
+            <a:avLst/>
+          </a:prstGeom>
+          <a:solidFill>
+            <a:schemeClr val="bg1"/>
+          </a:solidFill>
+          <a:ln>
+            <a:noFill/>
+          </a:ln>
+          <a:effectLst>
+            <a:outerShdw blurRad="139700" dist="127000" dir="5400000" algn="t" rotWithShape="0">
+              <a:prstClr val="black">
+                <a:alpha val="15000"/>
+              </a:prstClr>
+            </a:outerShdw>
+          </a:effectLst>
+        </p:spPr>
+        <p:style>
+          <a:lnRef idx="2">
+            <a:schemeClr val="accent1">
+              <a:shade val="50000"/>
+            </a:schemeClr>
+          </a:lnRef>
+          <a:fillRef idx="1">
+            <a:schemeClr val="accent1"/>
+          </a:fillRef>
+          <a:effectRef idx="0">
+            <a:schemeClr val="accent1"/>
+          </a:effectRef>
+          <a:fontRef idx="minor">
+            <a:schemeClr val="lt1"/>
+          </a:fontRef>
+        </p:style>
+        <p:txBody>
+          <a:bodyPr rtlCol="0" anchor="ctr"/>
+          <a:lstStyle/>
+          <a:p>
+            <a:pPr algn="ctr"/>
+            <a:endParaRPr lang="en-US"/>
+          </a:p>
+        </p:txBody>
+      </p:sp>
+      <p:sp>
+        <p:nvSpPr>
+          <p:cNvPr id="3" name="Espace réservé du contenu 2">
+            <a:extLst>
+              <a:ext uri="{FF2B5EF4-FFF2-40B4-BE49-F238E27FC236}">
+                <a16:creationId xmlns:a16="http://schemas.microsoft.com/office/drawing/2014/main" id="{BE46C37E-D4FF-D8EF-AD88-8A2E9AD3688E}"/>
+              </a:ext>
+            </a:extLst>
+          </p:cNvPr>
+          <p:cNvSpPr>
+            <a:spLocks noGrp="1"/>
+          </p:cNvSpPr>
+          <p:nvPr>
+            <p:ph idx="1"/>
+          </p:nvPr>
+        </p:nvSpPr>
+        <p:spPr>
+          <a:xfrm>
+            <a:off x="793661" y="2599509"/>
+            <a:ext cx="4530898" cy="3639450"/>
+          </a:xfrm>
+        </p:spPr>
+        <p:txBody>
+          <a:bodyPr anchor="ctr">
+            <a:normAutofit/>
+          </a:bodyPr>
+          <a:lstStyle/>
+          <a:p>
+            <a:r>
+              <a:rPr lang="fr-FR" sz="2000" b="1"/>
+              <a:t>Entrées fournies à Gemini</a:t>
+            </a:r>
+            <a:endParaRPr lang="fr-FR" sz="2000"/>
+          </a:p>
+          <a:p>
+            <a:pPr lvl="1"/>
+            <a:r>
+              <a:rPr lang="fr-FR" sz="2000"/>
+              <a:t>Fichier STL de la pièce</a:t>
+            </a:r>
+          </a:p>
+          <a:p>
+            <a:pPr lvl="1"/>
+            <a:r>
+              <a:rPr lang="fr-FR" sz="2000"/>
+              <a:t>Image du meuble</a:t>
+            </a:r>
+          </a:p>
+          <a:p>
+            <a:pPr lvl="1"/>
+            <a:r>
+              <a:rPr lang="fr-FR" sz="2000"/>
+              <a:t>Liste des matériaux </a:t>
+            </a:r>
+          </a:p>
+          <a:p>
+            <a:pPr lvl="1"/>
+            <a:r>
+              <a:rPr lang="fr-FR" sz="2000"/>
+              <a:t>Prompt pour cadrer la demande </a:t>
+            </a:r>
+          </a:p>
+        </p:txBody>
+      </p:sp>
+      <p:pic>
+        <p:nvPicPr>
+          <p:cNvPr id="5" name="Image 4" descr="Une image contenant Graphique, logo, graphisme, Police&#10;&#10;Le contenu généré par l’IA peut être incorrect.">
+            <a:extLst>
+              <a:ext uri="{FF2B5EF4-FFF2-40B4-BE49-F238E27FC236}">
+                <a16:creationId xmlns:a16="http://schemas.microsoft.com/office/drawing/2014/main" id="{6E739D2C-9F2D-81DF-AC90-D807A2518431}"/>
+              </a:ext>
+            </a:extLst>
+          </p:cNvPr>
+          <p:cNvPicPr>
+            <a:picLocks noChangeAspect="1"/>
+          </p:cNvPicPr>
+          <p:nvPr/>
+        </p:nvPicPr>
+        <p:blipFill>
+          <a:blip r:embed="rId2">
+            <a:extLst>
+              <a:ext uri="{28A0092B-C50C-407E-A947-70E740481C1C}">
+                <a14:useLocalDpi xmlns:a14="http://schemas.microsoft.com/office/drawing/2010/main" val="0"/>
+              </a:ext>
+            </a:extLst>
+          </a:blip>
+          <a:stretch>
+            <a:fillRect/>
+          </a:stretch>
+        </p:blipFill>
+        <p:spPr>
+          <a:xfrm>
+            <a:off x="5911532" y="2892862"/>
+            <a:ext cx="5150277" cy="2897030"/>
+          </a:xfrm>
+          <a:prstGeom prst="rect">
+            <a:avLst/>
+          </a:prstGeom>
+        </p:spPr>
+      </p:pic>
+      <p:sp>
+        <p:nvSpPr>
+          <p:cNvPr id="30" name="Rectangle 29">
+            <a:extLst>
+              <a:ext uri="{FF2B5EF4-FFF2-40B4-BE49-F238E27FC236}">
+                <a16:creationId xmlns:a16="http://schemas.microsoft.com/office/drawing/2014/main" id="{E6995CE5-F890-4ABA-82A2-26507CE8D2A3}"/>
+              </a:ext>
+              <a:ext uri="{C183D7F6-B498-43B3-948B-1728B52AA6E4}">
+                <adec:decorative xmlns:adec="http://schemas.microsoft.com/office/drawing/2017/decorative" val="1"/>
+              </a:ext>
+            </a:extLst>
+          </p:cNvPr>
+          <p:cNvSpPr>
+            <a:spLocks noGrp="1" noRot="1" noChangeAspect="1" noMove="1" noResize="1" noEditPoints="1" noAdjustHandles="1" noChangeArrowheads="1" noChangeShapeType="1" noTextEdit="1"/>
+          </p:cNvSpPr>
+          <p:nvPr>
+            <p:extLst>
+              <p:ext uri="{386F3935-93C4-4BCD-93E2-E3B085C9AB24}">
+                <p16:designElem xmlns:p16="http://schemas.microsoft.com/office/powerpoint/2015/main" val="1"/>
+              </p:ext>
+            </p:extLst>
+          </p:nvPr>
+        </p:nvSpPr>
+        <p:spPr>
+          <a:xfrm rot="5400000">
+            <a:off x="11228040" y="2313027"/>
+            <a:ext cx="781700" cy="152382"/>
+          </a:xfrm>
+          <a:prstGeom prst="rect">
+            <a:avLst/>
+          </a:prstGeom>
+          <a:solidFill>
+            <a:schemeClr val="accent4"/>
+          </a:solidFill>
+          <a:ln>
+            <a:noFill/>
+          </a:ln>
+        </p:spPr>
+        <p:style>
+          <a:lnRef idx="2">
+            <a:schemeClr val="accent1">
+              <a:shade val="50000"/>
+            </a:schemeClr>
+          </a:lnRef>
+          <a:fillRef idx="1">
+            <a:schemeClr val="accent1"/>
+          </a:fillRef>
+          <a:effectRef idx="0">
+            <a:schemeClr val="accent1"/>
+          </a:effectRef>
+          <a:fontRef idx="minor">
+            <a:schemeClr val="lt1"/>
+          </a:fontRef>
+        </p:style>
+        <p:txBody>
+          <a:bodyPr rtlCol="0" anchor="ctr"/>
+          <a:lstStyle/>
+          <a:p>
+            <a:pPr algn="ctr"/>
+            <a:endParaRPr lang="en-US"/>
+          </a:p>
+        </p:txBody>
+      </p:sp>
+    </p:spTree>
+    <p:extLst>
+      <p:ext uri="{BB962C8B-B14F-4D97-AF65-F5344CB8AC3E}">
+        <p14:creationId xmlns:p14="http://schemas.microsoft.com/office/powerpoint/2010/main" val="480561951"/>
+      </p:ext>
+    </p:extLst>
+  </p:cSld>
+  <p:clrMapOvr>
+    <a:masterClrMapping/>
+  </p:clrMapOvr>
+</p:sld>
+</file>
+
+<file path=ppt/slides/slide6.xml><?xml version="1.0" encoding="utf-8"?>
+<p:sld xmlns:a="http://schemas.openxmlformats.org/drawingml/2006/main" xmlns:r="http://schemas.openxmlformats.org/officeDocument/2006/relationships" xmlns:p="http://schemas.openxmlformats.org/presentationml/2006/main">
+  <p:cSld>
+    <p:bg>
+      <p:bgPr>
+        <a:solidFill>
+          <a:schemeClr val="bg1"/>
+        </a:solidFill>
+        <a:effectLst/>
+      </p:bgPr>
+    </p:bg>
+    <p:spTree>
+      <p:nvGrpSpPr>
+        <p:cNvPr id="1" name=""/>
+        <p:cNvGrpSpPr/>
+        <p:nvPr/>
+      </p:nvGrpSpPr>
+      <p:grpSpPr>
+        <a:xfrm>
+          <a:off x="0" y="0"/>
+          <a:ext cx="0" cy="0"/>
+          <a:chOff x="0" y="0"/>
+          <a:chExt cx="0" cy="0"/>
+        </a:xfrm>
+      </p:grpSpPr>
+      <p:sp useBgFill="1">
+        <p:nvSpPr>
+          <p:cNvPr id="8" name="Rectangle 7">
+            <a:extLst>
+              <a:ext uri="{FF2B5EF4-FFF2-40B4-BE49-F238E27FC236}">
+                <a16:creationId xmlns:a16="http://schemas.microsoft.com/office/drawing/2014/main" id="{DBF61EA3-B236-439E-9C0B-340980D56BEE}"/>
+              </a:ext>
+              <a:ext uri="{C183D7F6-B498-43B3-948B-1728B52AA6E4}">
+                <adec:decorative xmlns:adec="http://schemas.microsoft.com/office/drawing/2017/decorative" val="1"/>
+              </a:ext>
+            </a:extLst>
+          </p:cNvPr>
+          <p:cNvSpPr>
+            <a:spLocks noGrp="1" noRot="1" noChangeAspect="1" noMove="1" noResize="1" noEditPoints="1" noAdjustHandles="1" noChangeArrowheads="1" noChangeShapeType="1" noTextEdit="1"/>
+          </p:cNvSpPr>
+          <p:nvPr>
+            <p:extLst>
+              <p:ext uri="{386F3935-93C4-4BCD-93E2-E3B085C9AB24}">
+                <p16:designElem xmlns:p16="http://schemas.microsoft.com/office/powerpoint/2015/main" val="1"/>
+              </p:ext>
+            </p:extLst>
+          </p:nvPr>
+        </p:nvSpPr>
+        <p:spPr>
+          <a:xfrm>
+            <a:off x="0" y="0"/>
+            <a:ext cx="12191999" cy="6857365"/>
+          </a:xfrm>
+          <a:prstGeom prst="rect">
+            <a:avLst/>
+          </a:prstGeom>
+          <a:ln>
+            <a:noFill/>
+          </a:ln>
+        </p:spPr>
+        <p:style>
+          <a:lnRef idx="2">
+            <a:schemeClr val="accent1">
+              <a:shade val="50000"/>
+            </a:schemeClr>
+          </a:lnRef>
+          <a:fillRef idx="1">
+            <a:schemeClr val="accent1"/>
+          </a:fillRef>
+          <a:effectRef idx="0">
+            <a:schemeClr val="accent1"/>
+          </a:effectRef>
+          <a:fontRef idx="minor">
+            <a:schemeClr val="lt1"/>
+          </a:fontRef>
+        </p:style>
+        <p:txBody>
+          <a:bodyPr rtlCol="0" anchor="ctr"/>
+          <a:lstStyle/>
+          <a:p>
+            <a:pPr algn="ctr"/>
+            <a:endParaRPr lang="en-US"/>
+          </a:p>
+        </p:txBody>
+      </p:sp>
+      <p:sp>
+        <p:nvSpPr>
+          <p:cNvPr id="2" name="Titre 1">
+            <a:extLst>
+              <a:ext uri="{FF2B5EF4-FFF2-40B4-BE49-F238E27FC236}">
+                <a16:creationId xmlns:a16="http://schemas.microsoft.com/office/drawing/2014/main" id="{46B23D79-AC24-65D4-FEC1-10387E8B85B8}"/>
+              </a:ext>
+            </a:extLst>
+          </p:cNvPr>
+          <p:cNvSpPr>
+            <a:spLocks noGrp="1"/>
+          </p:cNvSpPr>
+          <p:nvPr>
+            <p:ph type="title"/>
+          </p:nvPr>
+        </p:nvSpPr>
+        <p:spPr>
+          <a:xfrm>
+            <a:off x="808638" y="386930"/>
+            <a:ext cx="9236700" cy="1188950"/>
+          </a:xfrm>
+        </p:spPr>
+        <p:txBody>
+          <a:bodyPr anchor="b">
+            <a:normAutofit/>
+          </a:bodyPr>
+          <a:lstStyle/>
+          <a:p>
+            <a:r>
+              <a:rPr lang="fr-FR" sz="5400" dirty="0"/>
+              <a:t>Résultat: </a:t>
+            </a:r>
+            <a:endParaRPr lang="es-AR" sz="5400" dirty="0"/>
           </a:p>
         </p:txBody>
       </p:sp>
       <p:grpSp>
         <p:nvGrpSpPr>
-          <p:cNvPr id="17" name="Group 9">
+          <p:cNvPr id="10" name="Group 9">
             <a:extLst>
               <a:ext uri="{FF2B5EF4-FFF2-40B4-BE49-F238E27FC236}">
                 <a16:creationId xmlns:a16="http://schemas.microsoft.com/office/drawing/2014/main" id="{28FAF094-D087-493F-8DF9-A486C2D6BBAA}"/>
@@ -5328,7 +5752,7 @@
         </p:grpSpPr>
         <p:sp>
           <p:nvSpPr>
-            <p:cNvPr id="18" name="Rectangle 17">
+            <p:cNvPr id="11" name="Rectangle 10">
               <a:extLst>
                 <a:ext uri="{FF2B5EF4-FFF2-40B4-BE49-F238E27FC236}">
                   <a16:creationId xmlns:a16="http://schemas.microsoft.com/office/drawing/2014/main" id="{8D7C88D8-5509-4514-925A-9CE148E5CBD6}"/>
@@ -5451,7 +5875,7 @@
       </p:grpSp>
       <p:sp>
         <p:nvSpPr>
-          <p:cNvPr id="19" name="Rectangle 18">
+          <p:cNvPr id="14" name="Rectangle 13">
             <a:extLst>
               <a:ext uri="{FF2B5EF4-FFF2-40B4-BE49-F238E27FC236}">
                 <a16:creationId xmlns:a16="http://schemas.microsoft.com/office/drawing/2014/main" id="{E659831F-0D9A-4C63-9EBB-8435B85A440F}"/>
@@ -5524,7 +5948,7 @@
           <p:cNvPr id="3" name="Espace réservé du contenu 2">
             <a:extLst>
               <a:ext uri="{FF2B5EF4-FFF2-40B4-BE49-F238E27FC236}">
-                <a16:creationId xmlns:a16="http://schemas.microsoft.com/office/drawing/2014/main" id="{BE46C37E-D4FF-D8EF-AD88-8A2E9AD3688E}"/>
+                <a16:creationId xmlns:a16="http://schemas.microsoft.com/office/drawing/2014/main" id="{151873E2-A88F-6CA7-06E7-FDFD8E2DA8A5}"/>
               </a:ext>
             </a:extLst>
           </p:cNvPr>
@@ -5548,100 +5972,64 @@
           <a:lstStyle/>
           <a:p>
             <a:r>
-              <a:rPr lang="fr-FR" sz="2200" b="1" dirty="0"/>
-              <a:t>Entrées fournies à Gemini</a:t>
-            </a:r>
-            <a:endParaRPr lang="fr-FR" sz="2200" dirty="0"/>
+              <a:rPr lang="fr-FR" sz="2400" dirty="0"/>
+              <a:t>Pour la gondole :</a:t>
+            </a:r>
+            <a:br>
+              <a:rPr lang="fr-FR" sz="2400" dirty="0"/>
+            </a:br>
+            <a:r>
+              <a:rPr lang="fr-FR" sz="2400" dirty="0"/>
+              <a:t>Prix estimé par </a:t>
+            </a:r>
+            <a:r>
+              <a:rPr lang="fr-FR" sz="2400" dirty="0" err="1"/>
+              <a:t>Pluo</a:t>
+            </a:r>
+            <a:r>
+              <a:rPr lang="fr-FR" sz="2400" dirty="0"/>
+              <a:t> : 5115 euros</a:t>
+            </a:r>
+            <a:br>
+              <a:rPr lang="fr-FR" sz="2400" dirty="0"/>
+            </a:br>
+            <a:r>
+              <a:rPr lang="fr-FR" sz="2400" dirty="0"/>
+              <a:t>Prix estimé par Gemini : 5397 euros</a:t>
+            </a:r>
+          </a:p>
+          <a:p>
+            <a:pPr marL="0" indent="0">
+              <a:buNone/>
+            </a:pPr>
+            <a:endParaRPr lang="fr-FR" sz="2400" dirty="0"/>
+          </a:p>
+          <a:p>
+            <a:r>
+              <a:rPr lang="fr-FR" sz="2400" dirty="0"/>
+              <a:t>Temps de traitement : </a:t>
+            </a:r>
           </a:p>
           <a:p>
             <a:pPr lvl="1"/>
             <a:r>
-              <a:rPr lang="fr-FR" sz="2200" dirty="0"/>
-              <a:t>Fichier </a:t>
-            </a:r>
-            <a:r>
-              <a:rPr lang="fr-FR" sz="2200" b="1" dirty="0"/>
-              <a:t>STL</a:t>
-            </a:r>
-            <a:r>
-              <a:rPr lang="fr-FR" sz="2200" dirty="0"/>
-              <a:t> de la pièce</a:t>
+              <a:rPr lang="fr-FR" sz="2000" dirty="0"/>
+              <a:t>environ 10 minutes sans abonnement.</a:t>
             </a:r>
           </a:p>
           <a:p>
             <a:pPr lvl="1"/>
             <a:r>
-              <a:rPr lang="fr-FR" sz="2200" b="1" dirty="0"/>
-              <a:t>Image</a:t>
-            </a:r>
-            <a:r>
-              <a:rPr lang="fr-FR" sz="2200" dirty="0"/>
-              <a:t> du meuble</a:t>
-            </a:r>
-          </a:p>
-          <a:p>
-            <a:pPr lvl="1"/>
-            <a:r>
-              <a:rPr lang="fr-FR" sz="2200" b="1" dirty="0"/>
-              <a:t>Liste des matériaux</a:t>
-            </a:r>
-            <a:r>
-              <a:rPr lang="fr-FR" sz="2200" dirty="0"/>
-              <a:t> </a:t>
-            </a:r>
-          </a:p>
-          <a:p>
-            <a:pPr lvl="1"/>
-            <a:r>
-              <a:rPr lang="fr-FR" sz="2200" dirty="0"/>
-              <a:t>Prompt pour cadrer la demande </a:t>
-            </a:r>
-          </a:p>
-          <a:p>
-            <a:r>
-              <a:rPr lang="fr-FR" sz="2200" b="1"/>
-              <a:t>Rôle du LLM</a:t>
-            </a:r>
-            <a:endParaRPr lang="fr-FR" sz="2200"/>
-          </a:p>
-          <a:p>
-            <a:pPr lvl="1"/>
-            <a:r>
-              <a:rPr lang="fr-FR" sz="2200" dirty="0"/>
-              <a:t>Interpréter la géométrie, l’apparence et les matériaux</a:t>
-            </a:r>
-          </a:p>
-          <a:p>
-            <a:pPr lvl="1"/>
-            <a:r>
-              <a:rPr lang="fr-FR" sz="2200" dirty="0"/>
-              <a:t>S’inspirer de références de prix dans la même gamme</a:t>
-            </a:r>
-          </a:p>
-          <a:p>
-            <a:pPr lvl="1"/>
-            <a:r>
-              <a:rPr lang="fr-FR" sz="2200" dirty="0"/>
-              <a:t>Fournir </a:t>
-            </a:r>
-            <a:r>
-              <a:rPr lang="fr-FR" sz="2200" b="1" dirty="0"/>
-              <a:t>plusieurs estimations de prix</a:t>
-            </a:r>
-            <a:r>
-              <a:rPr lang="fr-FR" sz="2200" dirty="0"/>
-              <a:t> pour la pièce ou le meuble</a:t>
-            </a:r>
-          </a:p>
-          <a:p>
-            <a:endParaRPr lang="es-AR" sz="2200" dirty="0"/>
+              <a:rPr lang="fr-FR" sz="2000" dirty="0"/>
+              <a:t>Avec un abonnement, le temps de traitement peut être 2 à 3 fois plus rapide.</a:t>
+            </a:r>
           </a:p>
         </p:txBody>
       </p:sp>
     </p:spTree>
     <p:extLst>
       <p:ext uri="{BB962C8B-B14F-4D97-AF65-F5344CB8AC3E}">
-        <p14:creationId xmlns:p14="http://schemas.microsoft.com/office/powerpoint/2010/main" val="480561951"/>
+        <p14:creationId xmlns:p14="http://schemas.microsoft.com/office/powerpoint/2010/main" val="2943464729"/>
       </p:ext>
     </p:extLst>
   </p:cSld>
@@ -5651,9 +6039,17 @@
 </p:sld>
 </file>
 
-<file path=ppt/slides/slide6.xml><?xml version="1.0" encoding="utf-8"?>
+<file path=ppt/slides/slide7.xml><?xml version="1.0" encoding="utf-8"?>
 <p:sld xmlns:a="http://schemas.openxmlformats.org/drawingml/2006/main" xmlns:r="http://schemas.openxmlformats.org/officeDocument/2006/relationships" xmlns:p="http://schemas.openxmlformats.org/presentationml/2006/main">
   <p:cSld>
+    <p:bg>
+      <p:bgPr>
+        <a:solidFill>
+          <a:schemeClr val="bg1"/>
+        </a:solidFill>
+        <a:effectLst/>
+      </p:bgPr>
+    </p:bg>
     <p:spTree>
       <p:nvGrpSpPr>
         <p:cNvPr id="1" name=""/>
@@ -5668,12 +6064,463 @@
           <a:chExt cx="0" cy="0"/>
         </a:xfrm>
       </p:grpSpPr>
+      <p:sp useBgFill="1">
+        <p:nvSpPr>
+          <p:cNvPr id="19" name="Rectangle 18">
+            <a:extLst>
+              <a:ext uri="{FF2B5EF4-FFF2-40B4-BE49-F238E27FC236}">
+                <a16:creationId xmlns:a16="http://schemas.microsoft.com/office/drawing/2014/main" id="{DEE2AD96-B495-4E06-9291-B71706F728CB}"/>
+              </a:ext>
+              <a:ext uri="{C183D7F6-B498-43B3-948B-1728B52AA6E4}">
+                <adec:decorative xmlns:adec="http://schemas.microsoft.com/office/drawing/2017/decorative" val="1"/>
+              </a:ext>
+            </a:extLst>
+          </p:cNvPr>
+          <p:cNvSpPr>
+            <a:spLocks noGrp="1" noRot="1" noChangeAspect="1" noMove="1" noResize="1" noEditPoints="1" noAdjustHandles="1" noChangeArrowheads="1" noChangeShapeType="1" noTextEdit="1"/>
+          </p:cNvSpPr>
+          <p:nvPr>
+            <p:extLst>
+              <p:ext uri="{386F3935-93C4-4BCD-93E2-E3B085C9AB24}">
+                <p16:designElem xmlns:p16="http://schemas.microsoft.com/office/powerpoint/2015/main" val="1"/>
+              </p:ext>
+            </p:extLst>
+          </p:nvPr>
+        </p:nvSpPr>
+        <p:spPr>
+          <a:xfrm>
+            <a:off x="0" y="0"/>
+            <a:ext cx="12192000" cy="6858000"/>
+          </a:xfrm>
+          <a:prstGeom prst="rect">
+            <a:avLst/>
+          </a:prstGeom>
+          <a:ln w="12700" cap="flat" cmpd="sng" algn="ctr">
+            <a:noFill/>
+            <a:prstDash val="solid"/>
+            <a:miter lim="800000"/>
+          </a:ln>
+          <a:effectLst/>
+          <a:extLst>
+            <a:ext uri="{91240B29-F687-4F45-9708-019B960494DF}">
+              <a14:hiddenLine xmlns:a14="http://schemas.microsoft.com/office/drawing/2010/main" w="12700" cap="flat" cmpd="sng" algn="ctr">
+                <a:solidFill>
+                  <a:schemeClr val="accent1">
+                    <a:shade val="50000"/>
+                  </a:schemeClr>
+                </a:solidFill>
+                <a:prstDash val="solid"/>
+                <a:miter lim="800000"/>
+              </a14:hiddenLine>
+            </a:ext>
+          </a:extLst>
+        </p:spPr>
+        <p:style>
+          <a:lnRef idx="2">
+            <a:schemeClr val="accent1">
+              <a:shade val="50000"/>
+            </a:schemeClr>
+          </a:lnRef>
+          <a:fillRef idx="1">
+            <a:schemeClr val="accent1"/>
+          </a:fillRef>
+          <a:effectRef idx="0">
+            <a:schemeClr val="accent1"/>
+          </a:effectRef>
+          <a:fontRef idx="minor">
+            <a:schemeClr val="lt1"/>
+          </a:fontRef>
+        </p:style>
+        <p:txBody>
+          <a:bodyPr rtlCol="0" anchor="ctr"/>
+          <a:lstStyle/>
+          <a:p>
+            <a:pPr algn="ctr"/>
+            <a:endParaRPr lang="en-US"/>
+          </a:p>
+        </p:txBody>
+      </p:sp>
+      <p:sp>
+        <p:nvSpPr>
+          <p:cNvPr id="21" name="Rectangle 20">
+            <a:extLst>
+              <a:ext uri="{FF2B5EF4-FFF2-40B4-BE49-F238E27FC236}">
+                <a16:creationId xmlns:a16="http://schemas.microsoft.com/office/drawing/2014/main" id="{53CF6D67-C5A8-4ADD-9E8E-1E38CA1D3166}"/>
+              </a:ext>
+              <a:ext uri="{C183D7F6-B498-43B3-948B-1728B52AA6E4}">
+                <adec:decorative xmlns:adec="http://schemas.microsoft.com/office/drawing/2017/decorative" val="1"/>
+              </a:ext>
+            </a:extLst>
+          </p:cNvPr>
+          <p:cNvSpPr>
+            <a:spLocks noGrp="1" noRot="1" noChangeAspect="1" noMove="1" noResize="1" noEditPoints="1" noAdjustHandles="1" noChangeArrowheads="1" noChangeShapeType="1" noTextEdit="1"/>
+          </p:cNvSpPr>
+          <p:nvPr>
+            <p:extLst>
+              <p:ext uri="{386F3935-93C4-4BCD-93E2-E3B085C9AB24}">
+                <p16:designElem xmlns:p16="http://schemas.microsoft.com/office/powerpoint/2015/main" val="1"/>
+              </p:ext>
+            </p:extLst>
+          </p:nvPr>
+        </p:nvSpPr>
+        <p:spPr>
+          <a:xfrm rot="5400000" flipH="1">
+            <a:off x="-638515" y="639280"/>
+            <a:ext cx="6858000" cy="5579440"/>
+          </a:xfrm>
+          <a:prstGeom prst="rect">
+            <a:avLst/>
+          </a:prstGeom>
+          <a:gradFill>
+            <a:gsLst>
+              <a:gs pos="8000">
+                <a:srgbClr val="000000"/>
+              </a:gs>
+              <a:gs pos="100000">
+                <a:schemeClr val="accent1">
+                  <a:lumMod val="75000"/>
+                </a:schemeClr>
+              </a:gs>
+            </a:gsLst>
+            <a:lin ang="3000000" scaled="0"/>
+          </a:gradFill>
+          <a:ln>
+            <a:noFill/>
+          </a:ln>
+        </p:spPr>
+        <p:style>
+          <a:lnRef idx="2">
+            <a:schemeClr val="accent1">
+              <a:shade val="50000"/>
+            </a:schemeClr>
+          </a:lnRef>
+          <a:fillRef idx="1">
+            <a:schemeClr val="accent1"/>
+          </a:fillRef>
+          <a:effectRef idx="0">
+            <a:schemeClr val="accent1"/>
+          </a:effectRef>
+          <a:fontRef idx="minor">
+            <a:schemeClr val="lt1"/>
+          </a:fontRef>
+        </p:style>
+        <p:txBody>
+          <a:bodyPr rtlCol="0" anchor="ctr"/>
+          <a:lstStyle/>
+          <a:p>
+            <a:pPr algn="ctr"/>
+            <a:endParaRPr lang="en-US"/>
+          </a:p>
+        </p:txBody>
+      </p:sp>
+      <p:sp>
+        <p:nvSpPr>
+          <p:cNvPr id="23" name="Rectangle 22">
+            <a:extLst>
+              <a:ext uri="{FF2B5EF4-FFF2-40B4-BE49-F238E27FC236}">
+                <a16:creationId xmlns:a16="http://schemas.microsoft.com/office/drawing/2014/main" id="{86909FA0-B515-4681-B7A8-FA281D133B94}"/>
+              </a:ext>
+              <a:ext uri="{C183D7F6-B498-43B3-948B-1728B52AA6E4}">
+                <adec:decorative xmlns:adec="http://schemas.microsoft.com/office/drawing/2017/decorative" val="1"/>
+              </a:ext>
+            </a:extLst>
+          </p:cNvPr>
+          <p:cNvSpPr>
+            <a:spLocks noGrp="1" noRot="1" noChangeAspect="1" noMove="1" noResize="1" noEditPoints="1" noAdjustHandles="1" noChangeArrowheads="1" noChangeShapeType="1" noTextEdit="1"/>
+          </p:cNvSpPr>
+          <p:nvPr>
+            <p:extLst>
+              <p:ext uri="{386F3935-93C4-4BCD-93E2-E3B085C9AB24}">
+                <p16:designElem xmlns:p16="http://schemas.microsoft.com/office/powerpoint/2015/main" val="1"/>
+              </p:ext>
+            </p:extLst>
+          </p:nvPr>
+        </p:nvSpPr>
+        <p:spPr>
+          <a:xfrm rot="5400000" flipH="1">
+            <a:off x="-393206" y="395206"/>
+            <a:ext cx="6346209" cy="5576080"/>
+          </a:xfrm>
+          <a:prstGeom prst="rect">
+            <a:avLst/>
+          </a:prstGeom>
+          <a:gradFill>
+            <a:gsLst>
+              <a:gs pos="0">
+                <a:srgbClr val="000000">
+                  <a:alpha val="0"/>
+                </a:srgbClr>
+              </a:gs>
+              <a:gs pos="99000">
+                <a:schemeClr val="accent1">
+                  <a:alpha val="0"/>
+                </a:schemeClr>
+              </a:gs>
+            </a:gsLst>
+            <a:lin ang="1800000" scaled="0"/>
+          </a:gradFill>
+          <a:ln>
+            <a:noFill/>
+          </a:ln>
+        </p:spPr>
+        <p:style>
+          <a:lnRef idx="2">
+            <a:schemeClr val="accent1">
+              <a:shade val="50000"/>
+            </a:schemeClr>
+          </a:lnRef>
+          <a:fillRef idx="1">
+            <a:schemeClr val="accent1"/>
+          </a:fillRef>
+          <a:effectRef idx="0">
+            <a:schemeClr val="accent1"/>
+          </a:effectRef>
+          <a:fontRef idx="minor">
+            <a:schemeClr val="lt1"/>
+          </a:fontRef>
+        </p:style>
+        <p:txBody>
+          <a:bodyPr rtlCol="0" anchor="ctr"/>
+          <a:lstStyle/>
+          <a:p>
+            <a:pPr algn="ctr"/>
+            <a:endParaRPr lang="en-US"/>
+          </a:p>
+        </p:txBody>
+      </p:sp>
+      <p:sp>
+        <p:nvSpPr>
+          <p:cNvPr id="25" name="Rectangle 24">
+            <a:extLst>
+              <a:ext uri="{FF2B5EF4-FFF2-40B4-BE49-F238E27FC236}">
+                <a16:creationId xmlns:a16="http://schemas.microsoft.com/office/drawing/2014/main" id="{21C9FE86-FCC3-4A31-AA1C-C882262B7FE7}"/>
+              </a:ext>
+              <a:ext uri="{C183D7F6-B498-43B3-948B-1728B52AA6E4}">
+                <adec:decorative xmlns:adec="http://schemas.microsoft.com/office/drawing/2017/decorative" val="1"/>
+              </a:ext>
+            </a:extLst>
+          </p:cNvPr>
+          <p:cNvSpPr>
+            <a:spLocks noGrp="1" noRot="1" noChangeAspect="1" noMove="1" noResize="1" noEditPoints="1" noAdjustHandles="1" noChangeArrowheads="1" noChangeShapeType="1" noTextEdit="1"/>
+          </p:cNvSpPr>
+          <p:nvPr>
+            <p:extLst>
+              <p:ext uri="{386F3935-93C4-4BCD-93E2-E3B085C9AB24}">
+                <p16:designElem xmlns:p16="http://schemas.microsoft.com/office/powerpoint/2015/main" val="1"/>
+              </p:ext>
+            </p:extLst>
+          </p:nvPr>
+        </p:nvSpPr>
+        <p:spPr>
+          <a:xfrm rot="5400000" flipH="1">
+            <a:off x="1528907" y="2818967"/>
+            <a:ext cx="2501979" cy="5576080"/>
+          </a:xfrm>
+          <a:prstGeom prst="rect">
+            <a:avLst/>
+          </a:prstGeom>
+          <a:gradFill>
+            <a:gsLst>
+              <a:gs pos="2000">
+                <a:schemeClr val="accent1">
+                  <a:alpha val="29000"/>
+                </a:schemeClr>
+              </a:gs>
+              <a:gs pos="100000">
+                <a:srgbClr val="000000">
+                  <a:alpha val="30000"/>
+                </a:srgbClr>
+              </a:gs>
+            </a:gsLst>
+            <a:lin ang="7800000" scaled="0"/>
+          </a:gradFill>
+          <a:ln>
+            <a:noFill/>
+          </a:ln>
+        </p:spPr>
+        <p:style>
+          <a:lnRef idx="2">
+            <a:schemeClr val="accent1">
+              <a:shade val="50000"/>
+            </a:schemeClr>
+          </a:lnRef>
+          <a:fillRef idx="1">
+            <a:schemeClr val="accent1"/>
+          </a:fillRef>
+          <a:effectRef idx="0">
+            <a:schemeClr val="accent1"/>
+          </a:effectRef>
+          <a:fontRef idx="minor">
+            <a:schemeClr val="lt1"/>
+          </a:fontRef>
+        </p:style>
+        <p:txBody>
+          <a:bodyPr rtlCol="0" anchor="ctr"/>
+          <a:lstStyle/>
+          <a:p>
+            <a:pPr algn="ctr"/>
+            <a:endParaRPr lang="en-US" dirty="0"/>
+          </a:p>
+        </p:txBody>
+      </p:sp>
+      <p:sp>
+        <p:nvSpPr>
+          <p:cNvPr id="27" name="Rectangle 26">
+            <a:extLst>
+              <a:ext uri="{FF2B5EF4-FFF2-40B4-BE49-F238E27FC236}">
+                <a16:creationId xmlns:a16="http://schemas.microsoft.com/office/drawing/2014/main" id="{7D96243B-ECED-4B71-8E06-AE9A285EAD20}"/>
+              </a:ext>
+              <a:ext uri="{C183D7F6-B498-43B3-948B-1728B52AA6E4}">
+                <adec:decorative xmlns:adec="http://schemas.microsoft.com/office/drawing/2017/decorative" val="1"/>
+              </a:ext>
+            </a:extLst>
+          </p:cNvPr>
+          <p:cNvSpPr>
+            <a:spLocks noGrp="1" noRot="1" noChangeAspect="1" noMove="1" noResize="1" noEditPoints="1" noAdjustHandles="1" noChangeArrowheads="1" noChangeShapeType="1" noTextEdit="1"/>
+          </p:cNvSpPr>
+          <p:nvPr>
+            <p:extLst>
+              <p:ext uri="{386F3935-93C4-4BCD-93E2-E3B085C9AB24}">
+                <p16:designElem xmlns:p16="http://schemas.microsoft.com/office/powerpoint/2015/main" val="1"/>
+              </p:ext>
+            </p:extLst>
+          </p:nvPr>
+        </p:nvSpPr>
+        <p:spPr>
+          <a:xfrm rot="5400000" flipH="1">
+            <a:off x="-425002" y="852793"/>
+            <a:ext cx="6858001" cy="5152412"/>
+          </a:xfrm>
+          <a:prstGeom prst="rect">
+            <a:avLst/>
+          </a:prstGeom>
+          <a:gradFill>
+            <a:gsLst>
+              <a:gs pos="0">
+                <a:srgbClr val="000000">
+                  <a:alpha val="0"/>
+                </a:srgbClr>
+              </a:gs>
+              <a:gs pos="99000">
+                <a:schemeClr val="accent1">
+                  <a:alpha val="11000"/>
+                </a:schemeClr>
+              </a:gs>
+            </a:gsLst>
+            <a:lin ang="7800000" scaled="0"/>
+          </a:gradFill>
+          <a:ln>
+            <a:noFill/>
+          </a:ln>
+        </p:spPr>
+        <p:style>
+          <a:lnRef idx="2">
+            <a:schemeClr val="accent1">
+              <a:shade val="50000"/>
+            </a:schemeClr>
+          </a:lnRef>
+          <a:fillRef idx="1">
+            <a:schemeClr val="accent1"/>
+          </a:fillRef>
+          <a:effectRef idx="0">
+            <a:schemeClr val="accent1"/>
+          </a:effectRef>
+          <a:fontRef idx="minor">
+            <a:schemeClr val="lt1"/>
+          </a:fontRef>
+        </p:style>
+        <p:txBody>
+          <a:bodyPr rtlCol="0" anchor="ctr"/>
+          <a:lstStyle/>
+          <a:p>
+            <a:pPr algn="ctr"/>
+            <a:endParaRPr lang="en-US"/>
+          </a:p>
+        </p:txBody>
+      </p:sp>
+      <p:sp>
+        <p:nvSpPr>
+          <p:cNvPr id="29" name="Oval 28">
+            <a:extLst>
+              <a:ext uri="{FF2B5EF4-FFF2-40B4-BE49-F238E27FC236}">
+                <a16:creationId xmlns:a16="http://schemas.microsoft.com/office/drawing/2014/main" id="{A09989E4-EFDC-4A90-A633-E0525FB4139E}"/>
+              </a:ext>
+              <a:ext uri="{C183D7F6-B498-43B3-948B-1728B52AA6E4}">
+                <adec:decorative xmlns:adec="http://schemas.microsoft.com/office/drawing/2017/decorative" val="1"/>
+              </a:ext>
+            </a:extLst>
+          </p:cNvPr>
+          <p:cNvSpPr>
+            <a:spLocks noGrp="1" noRot="1" noChangeAspect="1" noMove="1" noResize="1" noEditPoints="1" noAdjustHandles="1" noChangeArrowheads="1" noChangeShapeType="1" noTextEdit="1"/>
+          </p:cNvSpPr>
+          <p:nvPr>
+            <p:extLst>
+              <p:ext uri="{386F3935-93C4-4BCD-93E2-E3B085C9AB24}">
+                <p16:designElem xmlns:p16="http://schemas.microsoft.com/office/powerpoint/2015/main" val="1"/>
+              </p:ext>
+            </p:extLst>
+          </p:nvPr>
+        </p:nvSpPr>
+        <p:spPr>
+          <a:xfrm rot="6097846">
+            <a:off x="818753" y="1128497"/>
+            <a:ext cx="4318303" cy="4318303"/>
+          </a:xfrm>
+          <a:prstGeom prst="ellipse">
+            <a:avLst/>
+          </a:prstGeom>
+          <a:gradFill>
+            <a:gsLst>
+              <a:gs pos="39000">
+                <a:schemeClr val="accent1">
+                  <a:alpha val="0"/>
+                </a:schemeClr>
+              </a:gs>
+              <a:gs pos="100000">
+                <a:schemeClr val="accent1">
+                  <a:lumMod val="60000"/>
+                  <a:lumOff val="40000"/>
+                  <a:alpha val="15000"/>
+                </a:schemeClr>
+              </a:gs>
+            </a:gsLst>
+            <a:lin ang="17400000" scaled="0"/>
+          </a:gradFill>
+          <a:ln>
+            <a:noFill/>
+          </a:ln>
+        </p:spPr>
+        <p:style>
+          <a:lnRef idx="2">
+            <a:schemeClr val="accent1">
+              <a:shade val="50000"/>
+            </a:schemeClr>
+          </a:lnRef>
+          <a:fillRef idx="1">
+            <a:schemeClr val="accent1"/>
+          </a:fillRef>
+          <a:effectRef idx="0">
+            <a:schemeClr val="accent1"/>
+          </a:effectRef>
+          <a:fontRef idx="minor">
+            <a:schemeClr val="lt1"/>
+          </a:fontRef>
+        </p:style>
+        <p:txBody>
+          <a:bodyPr rtlCol="0" anchor="ctr"/>
+          <a:lstStyle/>
+          <a:p>
+            <a:pPr algn="ctr"/>
+            <a:endParaRPr lang="en-US" dirty="0"/>
+          </a:p>
+        </p:txBody>
+      </p:sp>
       <p:sp>
         <p:nvSpPr>
           <p:cNvPr id="2" name="Titre 1">
             <a:extLst>
               <a:ext uri="{FF2B5EF4-FFF2-40B4-BE49-F238E27FC236}">
-                <a16:creationId xmlns:a16="http://schemas.microsoft.com/office/drawing/2014/main" id="{46B23D79-AC24-65D4-FEC1-10387E8B85B8}"/>
+                <a16:creationId xmlns:a16="http://schemas.microsoft.com/office/drawing/2014/main" id="{7CA3430F-6B83-2950-080E-ABF55EA465C0}"/>
               </a:ext>
             </a:extLst>
           </p:cNvPr>
@@ -5684,20 +6531,32 @@
             <p:ph type="title"/>
           </p:nvPr>
         </p:nvSpPr>
-        <p:spPr/>
-        <p:txBody>
-          <a:bodyPr/>
-          <a:lstStyle/>
-          <a:p>
-            <a:r>
-              <a:rPr lang="fr-FR" dirty="0" err="1"/>
-              <a:t>Resultat</a:t>
-            </a:r>
-            <a:r>
-              <a:rPr lang="fr-FR" dirty="0"/>
-              <a:t>: </a:t>
-            </a:r>
-            <a:endParaRPr lang="es-AR" dirty="0"/>
+        <p:spPr>
+          <a:xfrm>
+            <a:off x="826396" y="586855"/>
+            <a:ext cx="4230100" cy="3387497"/>
+          </a:xfrm>
+        </p:spPr>
+        <p:txBody>
+          <a:bodyPr anchor="b">
+            <a:normAutofit/>
+          </a:bodyPr>
+          <a:lstStyle/>
+          <a:p>
+            <a:pPr algn="r"/>
+            <a:r>
+              <a:rPr lang="fr-FR" sz="4000" dirty="0">
+                <a:solidFill>
+                  <a:srgbClr val="FFFFFF"/>
+                </a:solidFill>
+              </a:rPr>
+              <a:t>Possibilité d’optimisation: </a:t>
+            </a:r>
+            <a:endParaRPr lang="es-AR" sz="4000" dirty="0">
+              <a:solidFill>
+                <a:srgbClr val="FFFFFF"/>
+              </a:solidFill>
+            </a:endParaRPr>
           </a:p>
         </p:txBody>
       </p:sp>
@@ -5706,7 +6565,7 @@
           <p:cNvPr id="3" name="Espace réservé du contenu 2">
             <a:extLst>
               <a:ext uri="{FF2B5EF4-FFF2-40B4-BE49-F238E27FC236}">
-                <a16:creationId xmlns:a16="http://schemas.microsoft.com/office/drawing/2014/main" id="{151873E2-A88F-6CA7-06E7-FDFD8E2DA8A5}"/>
+                <a16:creationId xmlns:a16="http://schemas.microsoft.com/office/drawing/2014/main" id="{7FCD4919-D435-1EA6-5A1C-2F9DC2D68DDB}"/>
               </a:ext>
             </a:extLst>
           </p:cNvPr>
@@ -5717,87 +6576,47 @@
             <p:ph idx="1"/>
           </p:nvPr>
         </p:nvSpPr>
-        <p:spPr/>
-        <p:txBody>
-          <a:bodyPr/>
-          <a:lstStyle/>
-          <a:p>
-            <a:r>
-              <a:rPr lang="fr-FR" dirty="0"/>
-              <a:t>Pour la Gondole:</a:t>
-            </a:r>
-          </a:p>
-          <a:p>
-            <a:pPr lvl="1"/>
-            <a:r>
-              <a:rPr lang="fr-FR" dirty="0"/>
-              <a:t>prix estimer par </a:t>
-            </a:r>
-            <a:r>
-              <a:rPr lang="fr-FR" dirty="0" err="1"/>
-              <a:t>Pluo</a:t>
-            </a:r>
-            <a:r>
-              <a:rPr lang="fr-FR" dirty="0"/>
-              <a:t> : </a:t>
-            </a:r>
-          </a:p>
-          <a:p>
-            <a:pPr lvl="1"/>
-            <a:r>
-              <a:rPr lang="fr-FR" dirty="0"/>
-              <a:t>Prix estimer par Gemini : </a:t>
-            </a:r>
-          </a:p>
-          <a:p>
-            <a:pPr lvl="1"/>
-            <a:endParaRPr lang="fr-FR" dirty="0"/>
-          </a:p>
-          <a:p>
-            <a:pPr marL="457200" lvl="1" indent="0">
+        <p:spPr>
+          <a:xfrm>
+            <a:off x="6503158" y="649480"/>
+            <a:ext cx="4862447" cy="5546047"/>
+          </a:xfrm>
+        </p:spPr>
+        <p:txBody>
+          <a:bodyPr anchor="ctr">
+            <a:normAutofit/>
+          </a:bodyPr>
+          <a:lstStyle/>
+          <a:p>
+            <a:r>
+              <a:rPr lang="fr-FR" sz="2000" dirty="0"/>
+              <a:t>Fournir des exemples au modèle, si possible à deux niveaux de difficulté, afin de l’encadrer dans l’estimation du prix.</a:t>
+            </a:r>
+          </a:p>
+          <a:p>
+            <a:r>
+              <a:rPr lang="fr-FR" sz="2000" dirty="0"/>
+              <a:t>Possibilité d’élargir l’estimation à plusieurs pièces en même temps.</a:t>
+            </a:r>
+          </a:p>
+          <a:p>
+            <a:r>
+              <a:rPr lang="fr-FR" sz="2000" dirty="0"/>
+              <a:t>…</a:t>
+            </a:r>
+          </a:p>
+          <a:p>
+            <a:pPr marL="0" indent="0">
               <a:buNone/>
             </a:pPr>
-            <a:r>
-              <a:rPr lang="fr-FR" dirty="0"/>
-              <a:t>Temps de </a:t>
-            </a:r>
-            <a:r>
-              <a:rPr lang="fr-FR" dirty="0" err="1"/>
-              <a:t>processe</a:t>
-            </a:r>
-            <a:r>
-              <a:rPr lang="fr-FR" dirty="0"/>
-              <a:t> environ 10 min sans </a:t>
-            </a:r>
-            <a:r>
-              <a:rPr lang="fr-FR" dirty="0" err="1"/>
-              <a:t>surcoup</a:t>
-            </a:r>
-            <a:r>
-              <a:rPr lang="fr-FR" dirty="0"/>
-              <a:t> </a:t>
-            </a:r>
-            <a:r>
-              <a:rPr lang="fr-FR" dirty="0" err="1"/>
-              <a:t>possibelement</a:t>
-            </a:r>
-            <a:r>
-              <a:rPr lang="fr-FR" dirty="0"/>
-              <a:t> 2 voir 3 fois moins avec un abonnement.</a:t>
-            </a:r>
-          </a:p>
-          <a:p>
-            <a:pPr marL="457200" lvl="1" indent="0">
-              <a:buNone/>
-            </a:pPr>
-            <a:endParaRPr lang="fr-FR" dirty="0"/>
+            <a:endParaRPr lang="es-AR" sz="2000" dirty="0"/>
           </a:p>
         </p:txBody>
       </p:sp>
     </p:spTree>
     <p:extLst>
       <p:ext uri="{BB962C8B-B14F-4D97-AF65-F5344CB8AC3E}">
-        <p14:creationId xmlns:p14="http://schemas.microsoft.com/office/powerpoint/2010/main" val="2943464729"/>
+        <p14:creationId xmlns:p14="http://schemas.microsoft.com/office/powerpoint/2010/main" val="3315021624"/>
       </p:ext>
     </p:extLst>
   </p:cSld>
